--- a/stage2/PINNacles_Stage2_Presentation.pptx
+++ b/stage2/PINNacles_Stage2_Presentation.pptx
@@ -13,6 +13,8 @@
     <p:sldId id="261" r:id="rId12"/>
     <p:sldId id="262" r:id="rId13"/>
     <p:sldId id="263" r:id="rId14"/>
+    <p:sldId id="264" r:id="rId15"/>
+    <p:sldId id="265" r:id="rId16"/>
   </p:sldIdLst>
   <p:sldSz cx="12188952" cy="6858000" type="screen4x3"/>
   <p:notesSz cx="6858000" cy="9144000"/>
@@ -3189,8 +3191,8 @@
         </p:nvSpPr>
         <p:spPr>
           <a:xfrm>
-            <a:off x="914400" y="2011680"/>
-            <a:ext cx="10360152" cy="1371600"/>
+            <a:off x="914400" y="1554480"/>
+            <a:ext cx="10360152" cy="457200"/>
           </a:xfrm>
           <a:prstGeom prst="rect">
             <a:avLst/>
@@ -3204,19 +3206,15 @@
           <a:lstStyle/>
           <a:p>
             <a:pPr algn="l">
-              <a:defRPr sz="4400" b="1">
-                <a:solidFill>
-                  <a:srgbClr val="FFFFFF"/>
-                </a:solidFill>
-                <a:latin typeface="Arial"/>
-              </a:defRPr>
-            </a:pPr>
-            <a:r>
-              <a:t>Fourier Neural Operator for</a:t>
-            </a:r>
-            <a:br/>
-            <a:r>
-              <a:t>Parametric Darcy Flow</a:t>
+              <a:defRPr sz="2000" b="0">
+                <a:solidFill>
+                  <a:srgbClr val="D6E4F0"/>
+                </a:solidFill>
+                <a:latin typeface="Arial"/>
+              </a:defRPr>
+            </a:pPr>
+            <a:r>
+              <a:t>AE646 Stage 2 (Interim) Presentation</a:t>
             </a:r>
           </a:p>
         </p:txBody>
@@ -3229,8 +3227,8 @@
         </p:nvSpPr>
         <p:spPr>
           <a:xfrm>
-            <a:off x="914400" y="1554480"/>
-            <a:ext cx="10360152" cy="457200"/>
+            <a:off x="914400" y="2011680"/>
+            <a:ext cx="10360152" cy="1371600"/>
           </a:xfrm>
           <a:prstGeom prst="rect">
             <a:avLst/>
@@ -3244,15 +3242,19 @@
           <a:lstStyle/>
           <a:p>
             <a:pPr algn="l">
-              <a:defRPr sz="2000" b="0">
-                <a:solidFill>
-                  <a:srgbClr val="D6E4F0"/>
-                </a:solidFill>
-                <a:latin typeface="Arial"/>
-              </a:defRPr>
-            </a:pPr>
-            <a:r>
-              <a:t>AE646 Stage 2 (Interim) Presentation</a:t>
+              <a:defRPr sz="4400" b="1">
+                <a:solidFill>
+                  <a:srgbClr val="FFFFFF"/>
+                </a:solidFill>
+                <a:latin typeface="Arial"/>
+              </a:defRPr>
+            </a:pPr>
+            <a:r>
+              <a:t>Fourier Neural Operator for</a:t>
+            </a:r>
+            <a:br/>
+            <a:r>
+              <a:t>Parametric Darcy Flow</a:t>
             </a:r>
           </a:p>
         </p:txBody>
@@ -3265,7 +3267,7 @@
         </p:nvSpPr>
         <p:spPr>
           <a:xfrm>
-            <a:off x="914400" y="3566160"/>
+            <a:off x="914400" y="3749039"/>
             <a:ext cx="10360152" cy="457200"/>
           </a:xfrm>
           <a:prstGeom prst="rect">
@@ -3289,6 +3291,800 @@
             </a:pPr>
             <a:r>
               <a:t>Team: PINNacles (Aryamann Srivastava, Varun Sathaye, Atishay Jain, Vedant S. Tiwari)</a:t>
+            </a:r>
+          </a:p>
+        </p:txBody>
+      </p:sp>
+    </p:spTree>
+  </p:cSld>
+  <p:clrMapOvr>
+    <a:masterClrMapping/>
+  </p:clrMapOvr>
+</p:sld>
+</file>
+
+<file path=ppt/slides/slide10.xml><?xml version="1.0" encoding="utf-8"?>
+<p:sld xmlns:a="http://schemas.openxmlformats.org/drawingml/2006/main" xmlns:p="http://schemas.openxmlformats.org/presentationml/2006/main" xmlns:r="http://schemas.openxmlformats.org/officeDocument/2006/relationships">
+  <p:cSld>
+    <p:spTree>
+      <p:nvGrpSpPr>
+        <p:cNvPr id="1" name=""/>
+        <p:cNvGrpSpPr/>
+        <p:nvPr/>
+      </p:nvGrpSpPr>
+      <p:grpSpPr/>
+      <p:sp>
+        <p:nvSpPr>
+          <p:cNvPr id="2" name="Rectangle 1"/>
+          <p:cNvSpPr/>
+          <p:nvPr/>
+        </p:nvSpPr>
+        <p:spPr>
+          <a:xfrm>
+            <a:off x="0" y="0"/>
+            <a:ext cx="12188952" cy="6858000"/>
+          </a:xfrm>
+          <a:prstGeom prst="rect">
+            <a:avLst/>
+          </a:prstGeom>
+          <a:solidFill>
+            <a:srgbClr val="1A2E4A"/>
+          </a:solidFill>
+          <a:ln w="15240">
+            <a:noFill/>
+          </a:ln>
+        </p:spPr>
+        <p:style>
+          <a:lnRef idx="1">
+            <a:schemeClr val="accent1"/>
+          </a:lnRef>
+          <a:fillRef idx="3">
+            <a:schemeClr val="accent1"/>
+          </a:fillRef>
+          <a:effectRef idx="2">
+            <a:schemeClr val="accent1"/>
+          </a:effectRef>
+          <a:fontRef idx="minor">
+            <a:schemeClr val="lt1"/>
+          </a:fontRef>
+        </p:style>
+        <p:txBody>
+          <a:bodyPr rtlCol="0" anchor="ctr"/>
+          <a:lstStyle/>
+          <a:p>
+            <a:pPr algn="ctr"/>
+          </a:p>
+        </p:txBody>
+      </p:sp>
+      <p:sp>
+        <p:nvSpPr>
+          <p:cNvPr id="3" name="Rectangle 2"/>
+          <p:cNvSpPr/>
+          <p:nvPr/>
+        </p:nvSpPr>
+        <p:spPr>
+          <a:xfrm>
+            <a:off x="0" y="1024128"/>
+            <a:ext cx="12188952" cy="64008"/>
+          </a:xfrm>
+          <a:prstGeom prst="rect">
+            <a:avLst/>
+          </a:prstGeom>
+          <a:solidFill>
+            <a:srgbClr val="2E86C1"/>
+          </a:solidFill>
+          <a:ln w="15240">
+            <a:noFill/>
+          </a:ln>
+        </p:spPr>
+        <p:style>
+          <a:lnRef idx="1">
+            <a:schemeClr val="accent1"/>
+          </a:lnRef>
+          <a:fillRef idx="3">
+            <a:schemeClr val="accent1"/>
+          </a:fillRef>
+          <a:effectRef idx="2">
+            <a:schemeClr val="accent1"/>
+          </a:effectRef>
+          <a:fontRef idx="minor">
+            <a:schemeClr val="lt1"/>
+          </a:fontRef>
+        </p:style>
+        <p:txBody>
+          <a:bodyPr rtlCol="0" anchor="ctr"/>
+          <a:lstStyle/>
+          <a:p>
+            <a:pPr algn="ctr"/>
+          </a:p>
+        </p:txBody>
+      </p:sp>
+      <p:sp>
+        <p:nvSpPr>
+          <p:cNvPr id="4" name="TextBox 3"/>
+          <p:cNvSpPr txBox="1"/>
+          <p:nvPr/>
+        </p:nvSpPr>
+        <p:spPr>
+          <a:xfrm>
+            <a:off x="548640" y="164592"/>
+            <a:ext cx="11091672" cy="777240"/>
+          </a:xfrm>
+          <a:prstGeom prst="rect">
+            <a:avLst/>
+          </a:prstGeom>
+          <a:noFill/>
+        </p:spPr>
+        <p:txBody>
+          <a:bodyPr wrap="square">
+            <a:spAutoFit/>
+          </a:bodyPr>
+          <a:lstStyle/>
+          <a:p>
+            <a:pPr algn="l">
+              <a:defRPr sz="3600" b="1">
+                <a:solidFill>
+                  <a:srgbClr val="FFFFFF"/>
+                </a:solidFill>
+                <a:latin typeface="Arial"/>
+              </a:defRPr>
+            </a:pPr>
+            <a:r>
+              <a:t>Summary</a:t>
+            </a:r>
+          </a:p>
+        </p:txBody>
+      </p:sp>
+      <p:sp>
+        <p:nvSpPr>
+          <p:cNvPr id="5" name="Rectangle 4"/>
+          <p:cNvSpPr/>
+          <p:nvPr/>
+        </p:nvSpPr>
+        <p:spPr>
+          <a:xfrm>
+            <a:off x="457200" y="1371600"/>
+            <a:ext cx="1828800" cy="758952"/>
+          </a:xfrm>
+          <a:prstGeom prst="rect">
+            <a:avLst/>
+          </a:prstGeom>
+          <a:solidFill>
+            <a:srgbClr val="2E86C1"/>
+          </a:solidFill>
+          <a:ln w="15240">
+            <a:noFill/>
+          </a:ln>
+        </p:spPr>
+        <p:style>
+          <a:lnRef idx="1">
+            <a:schemeClr val="accent1"/>
+          </a:lnRef>
+          <a:fillRef idx="3">
+            <a:schemeClr val="accent1"/>
+          </a:fillRef>
+          <a:effectRef idx="2">
+            <a:schemeClr val="accent1"/>
+          </a:effectRef>
+          <a:fontRef idx="minor">
+            <a:schemeClr val="lt1"/>
+          </a:fontRef>
+        </p:style>
+        <p:txBody>
+          <a:bodyPr rtlCol="0" anchor="ctr"/>
+          <a:lstStyle/>
+          <a:p>
+            <a:pPr algn="ctr"/>
+          </a:p>
+        </p:txBody>
+      </p:sp>
+      <p:sp>
+        <p:nvSpPr>
+          <p:cNvPr id="6" name="TextBox 5"/>
+          <p:cNvSpPr txBox="1"/>
+          <p:nvPr/>
+        </p:nvSpPr>
+        <p:spPr>
+          <a:xfrm>
+            <a:off x="457200" y="1554480"/>
+            <a:ext cx="1828800" cy="731520"/>
+          </a:xfrm>
+          <a:prstGeom prst="rect">
+            <a:avLst/>
+          </a:prstGeom>
+          <a:noFill/>
+        </p:spPr>
+        <p:txBody>
+          <a:bodyPr wrap="square">
+            <a:spAutoFit/>
+          </a:bodyPr>
+          <a:lstStyle/>
+          <a:p>
+            <a:pPr algn="ctr">
+              <a:defRPr sz="1700" b="1">
+                <a:solidFill>
+                  <a:srgbClr val="FFFFFF"/>
+                </a:solidFill>
+                <a:latin typeface="Arial"/>
+              </a:defRPr>
+            </a:pPr>
+            <a:r>
+              <a:t>Data</a:t>
+            </a:r>
+          </a:p>
+        </p:txBody>
+      </p:sp>
+      <p:sp>
+        <p:nvSpPr>
+          <p:cNvPr id="7" name="TextBox 6"/>
+          <p:cNvSpPr txBox="1"/>
+          <p:nvPr/>
+        </p:nvSpPr>
+        <p:spPr>
+          <a:xfrm>
+            <a:off x="2468880" y="1517904"/>
+            <a:ext cx="9262872" cy="704088"/>
+          </a:xfrm>
+          <a:prstGeom prst="rect">
+            <a:avLst/>
+          </a:prstGeom>
+          <a:noFill/>
+        </p:spPr>
+        <p:txBody>
+          <a:bodyPr wrap="square">
+            <a:spAutoFit/>
+          </a:bodyPr>
+          <a:lstStyle/>
+          <a:p>
+            <a:pPr algn="l">
+              <a:defRPr sz="1600" b="0">
+                <a:solidFill>
+                  <a:srgbClr val="D6E4F0"/>
+                </a:solidFill>
+                <a:latin typeface="Arial"/>
+              </a:defRPr>
+            </a:pPr>
+            <a:r>
+              <a:t>Real PDEBench pipeline complete: 900 / 100 / 200 split at 64×64; EDA and preprocessing ablation done</a:t>
+            </a:r>
+          </a:p>
+        </p:txBody>
+      </p:sp>
+      <p:sp>
+        <p:nvSpPr>
+          <p:cNvPr id="8" name="Rectangle 7"/>
+          <p:cNvSpPr/>
+          <p:nvPr/>
+        </p:nvSpPr>
+        <p:spPr>
+          <a:xfrm>
+            <a:off x="457200" y="2240280"/>
+            <a:ext cx="1828800" cy="758952"/>
+          </a:xfrm>
+          <a:prstGeom prst="rect">
+            <a:avLst/>
+          </a:prstGeom>
+          <a:solidFill>
+            <a:srgbClr val="2E86C1"/>
+          </a:solidFill>
+          <a:ln w="15240">
+            <a:noFill/>
+          </a:ln>
+        </p:spPr>
+        <p:style>
+          <a:lnRef idx="1">
+            <a:schemeClr val="accent1"/>
+          </a:lnRef>
+          <a:fillRef idx="3">
+            <a:schemeClr val="accent1"/>
+          </a:fillRef>
+          <a:effectRef idx="2">
+            <a:schemeClr val="accent1"/>
+          </a:effectRef>
+          <a:fontRef idx="minor">
+            <a:schemeClr val="lt1"/>
+          </a:fontRef>
+        </p:style>
+        <p:txBody>
+          <a:bodyPr rtlCol="0" anchor="ctr"/>
+          <a:lstStyle/>
+          <a:p>
+            <a:pPr algn="ctr"/>
+          </a:p>
+        </p:txBody>
+      </p:sp>
+      <p:sp>
+        <p:nvSpPr>
+          <p:cNvPr id="9" name="TextBox 8"/>
+          <p:cNvSpPr txBox="1"/>
+          <p:nvPr/>
+        </p:nvSpPr>
+        <p:spPr>
+          <a:xfrm>
+            <a:off x="457200" y="2423160"/>
+            <a:ext cx="1828800" cy="731520"/>
+          </a:xfrm>
+          <a:prstGeom prst="rect">
+            <a:avLst/>
+          </a:prstGeom>
+          <a:noFill/>
+        </p:spPr>
+        <p:txBody>
+          <a:bodyPr wrap="square">
+            <a:spAutoFit/>
+          </a:bodyPr>
+          <a:lstStyle/>
+          <a:p>
+            <a:pPr algn="ctr">
+              <a:defRPr sz="1700" b="1">
+                <a:solidFill>
+                  <a:srgbClr val="FFFFFF"/>
+                </a:solidFill>
+                <a:latin typeface="Arial"/>
+              </a:defRPr>
+            </a:pPr>
+            <a:r>
+              <a:t>Baseline</a:t>
+            </a:r>
+          </a:p>
+        </p:txBody>
+      </p:sp>
+      <p:sp>
+        <p:nvSpPr>
+          <p:cNvPr id="10" name="TextBox 9"/>
+          <p:cNvSpPr txBox="1"/>
+          <p:nvPr/>
+        </p:nvSpPr>
+        <p:spPr>
+          <a:xfrm>
+            <a:off x="2468880" y="2386584"/>
+            <a:ext cx="9262872" cy="704088"/>
+          </a:xfrm>
+          <a:prstGeom prst="rect">
+            <a:avLst/>
+          </a:prstGeom>
+          <a:noFill/>
+        </p:spPr>
+        <p:txBody>
+          <a:bodyPr wrap="square">
+            <a:spAutoFit/>
+          </a:bodyPr>
+          <a:lstStyle/>
+          <a:p>
+            <a:pPr algn="l">
+              <a:defRPr sz="1600" b="0">
+                <a:solidFill>
+                  <a:srgbClr val="D6E4F0"/>
+                </a:solidFill>
+                <a:latin typeface="Arial"/>
+              </a:defRPr>
+            </a:pPr>
+            <a:r>
+              <a:t>MLP (42 M) implemented and tuned by depth / optimiser / preprocessing ablations: mean rel. L2 0.082</a:t>
+            </a:r>
+          </a:p>
+        </p:txBody>
+      </p:sp>
+      <p:sp>
+        <p:nvSpPr>
+          <p:cNvPr id="11" name="Rectangle 10"/>
+          <p:cNvSpPr/>
+          <p:nvPr/>
+        </p:nvSpPr>
+        <p:spPr>
+          <a:xfrm>
+            <a:off x="457200" y="3108960"/>
+            <a:ext cx="1828800" cy="758952"/>
+          </a:xfrm>
+          <a:prstGeom prst="rect">
+            <a:avLst/>
+          </a:prstGeom>
+          <a:solidFill>
+            <a:srgbClr val="2E86C1"/>
+          </a:solidFill>
+          <a:ln w="15240">
+            <a:noFill/>
+          </a:ln>
+        </p:spPr>
+        <p:style>
+          <a:lnRef idx="1">
+            <a:schemeClr val="accent1"/>
+          </a:lnRef>
+          <a:fillRef idx="3">
+            <a:schemeClr val="accent1"/>
+          </a:fillRef>
+          <a:effectRef idx="2">
+            <a:schemeClr val="accent1"/>
+          </a:effectRef>
+          <a:fontRef idx="minor">
+            <a:schemeClr val="lt1"/>
+          </a:fontRef>
+        </p:style>
+        <p:txBody>
+          <a:bodyPr rtlCol="0" anchor="ctr"/>
+          <a:lstStyle/>
+          <a:p>
+            <a:pPr algn="ctr"/>
+          </a:p>
+        </p:txBody>
+      </p:sp>
+      <p:sp>
+        <p:nvSpPr>
+          <p:cNvPr id="12" name="TextBox 11"/>
+          <p:cNvSpPr txBox="1"/>
+          <p:nvPr/>
+        </p:nvSpPr>
+        <p:spPr>
+          <a:xfrm>
+            <a:off x="457200" y="3291840"/>
+            <a:ext cx="1828800" cy="731520"/>
+          </a:xfrm>
+          <a:prstGeom prst="rect">
+            <a:avLst/>
+          </a:prstGeom>
+          <a:noFill/>
+        </p:spPr>
+        <p:txBody>
+          <a:bodyPr wrap="square">
+            <a:spAutoFit/>
+          </a:bodyPr>
+          <a:lstStyle/>
+          <a:p>
+            <a:pPr algn="ctr">
+              <a:defRPr sz="1700" b="1">
+                <a:solidFill>
+                  <a:srgbClr val="FFFFFF"/>
+                </a:solidFill>
+                <a:latin typeface="Arial"/>
+              </a:defRPr>
+            </a:pPr>
+            <a:r>
+              <a:t>SciML</a:t>
+            </a:r>
+          </a:p>
+        </p:txBody>
+      </p:sp>
+      <p:sp>
+        <p:nvSpPr>
+          <p:cNvPr id="13" name="TextBox 12"/>
+          <p:cNvSpPr txBox="1"/>
+          <p:nvPr/>
+        </p:nvSpPr>
+        <p:spPr>
+          <a:xfrm>
+            <a:off x="2468880" y="3255264"/>
+            <a:ext cx="9262872" cy="704088"/>
+          </a:xfrm>
+          <a:prstGeom prst="rect">
+            <a:avLst/>
+          </a:prstGeom>
+          <a:noFill/>
+        </p:spPr>
+        <p:txBody>
+          <a:bodyPr wrap="square">
+            <a:spAutoFit/>
+          </a:bodyPr>
+          <a:lstStyle/>
+          <a:p>
+            <a:pPr algn="l">
+              <a:defRPr sz="1600" b="0">
+                <a:solidFill>
+                  <a:srgbClr val="D6E4F0"/>
+                </a:solidFill>
+                <a:latin typeface="Arial"/>
+              </a:defRPr>
+            </a:pPr>
+            <a:r>
+              <a:t>FNO (4.7 M) implemented and trained: mean rel. L2 0.052, 37% lower with 9× fewer parameters</a:t>
+            </a:r>
+          </a:p>
+        </p:txBody>
+      </p:sp>
+      <p:sp>
+        <p:nvSpPr>
+          <p:cNvPr id="14" name="Rectangle 13"/>
+          <p:cNvSpPr/>
+          <p:nvPr/>
+        </p:nvSpPr>
+        <p:spPr>
+          <a:xfrm>
+            <a:off x="457200" y="3977640"/>
+            <a:ext cx="1828800" cy="758952"/>
+          </a:xfrm>
+          <a:prstGeom prst="rect">
+            <a:avLst/>
+          </a:prstGeom>
+          <a:solidFill>
+            <a:srgbClr val="2E86C1"/>
+          </a:solidFill>
+          <a:ln w="15240">
+            <a:noFill/>
+          </a:ln>
+        </p:spPr>
+        <p:style>
+          <a:lnRef idx="1">
+            <a:schemeClr val="accent1"/>
+          </a:lnRef>
+          <a:fillRef idx="3">
+            <a:schemeClr val="accent1"/>
+          </a:fillRef>
+          <a:effectRef idx="2">
+            <a:schemeClr val="accent1"/>
+          </a:effectRef>
+          <a:fontRef idx="minor">
+            <a:schemeClr val="lt1"/>
+          </a:fontRef>
+        </p:style>
+        <p:txBody>
+          <a:bodyPr rtlCol="0" anchor="ctr"/>
+          <a:lstStyle/>
+          <a:p>
+            <a:pPr algn="ctr"/>
+          </a:p>
+        </p:txBody>
+      </p:sp>
+      <p:sp>
+        <p:nvSpPr>
+          <p:cNvPr id="15" name="TextBox 14"/>
+          <p:cNvSpPr txBox="1"/>
+          <p:nvPr/>
+        </p:nvSpPr>
+        <p:spPr>
+          <a:xfrm>
+            <a:off x="457200" y="4160520"/>
+            <a:ext cx="1828800" cy="731520"/>
+          </a:xfrm>
+          <a:prstGeom prst="rect">
+            <a:avLst/>
+          </a:prstGeom>
+          <a:noFill/>
+        </p:spPr>
+        <p:txBody>
+          <a:bodyPr wrap="square">
+            <a:spAutoFit/>
+          </a:bodyPr>
+          <a:lstStyle/>
+          <a:p>
+            <a:pPr algn="ctr">
+              <a:defRPr sz="1700" b="1">
+                <a:solidFill>
+                  <a:srgbClr val="FFFFFF"/>
+                </a:solidFill>
+                <a:latin typeface="Arial"/>
+              </a:defRPr>
+            </a:pPr>
+            <a:r>
+              <a:t>Insight</a:t>
+            </a:r>
+          </a:p>
+        </p:txBody>
+      </p:sp>
+      <p:sp>
+        <p:nvSpPr>
+          <p:cNvPr id="16" name="TextBox 15"/>
+          <p:cNvSpPr txBox="1"/>
+          <p:nvPr/>
+        </p:nvSpPr>
+        <p:spPr>
+          <a:xfrm>
+            <a:off x="2468880" y="4123944"/>
+            <a:ext cx="9262872" cy="704088"/>
+          </a:xfrm>
+          <a:prstGeom prst="rect">
+            <a:avLst/>
+          </a:prstGeom>
+          <a:noFill/>
+        </p:spPr>
+        <p:txBody>
+          <a:bodyPr wrap="square">
+            <a:spAutoFit/>
+          </a:bodyPr>
+          <a:lstStyle/>
+          <a:p>
+            <a:pPr algn="l">
+              <a:defRPr sz="1600" b="0">
+                <a:solidFill>
+                  <a:srgbClr val="D6E4F0"/>
+                </a:solidFill>
+                <a:latin typeface="Arial"/>
+              </a:defRPr>
+            </a:pPr>
+            <a:r>
+              <a:t>Worst FNO case is a degenerate uniform-κ field, not a complex one</a:t>
+            </a:r>
+          </a:p>
+        </p:txBody>
+      </p:sp>
+      <p:sp>
+        <p:nvSpPr>
+          <p:cNvPr id="17" name="Rectangle 16"/>
+          <p:cNvSpPr/>
+          <p:nvPr/>
+        </p:nvSpPr>
+        <p:spPr>
+          <a:xfrm>
+            <a:off x="457200" y="4846320"/>
+            <a:ext cx="1828800" cy="758952"/>
+          </a:xfrm>
+          <a:prstGeom prst="rect">
+            <a:avLst/>
+          </a:prstGeom>
+          <a:solidFill>
+            <a:srgbClr val="2E86C1"/>
+          </a:solidFill>
+          <a:ln w="15240">
+            <a:noFill/>
+          </a:ln>
+        </p:spPr>
+        <p:style>
+          <a:lnRef idx="1">
+            <a:schemeClr val="accent1"/>
+          </a:lnRef>
+          <a:fillRef idx="3">
+            <a:schemeClr val="accent1"/>
+          </a:fillRef>
+          <a:effectRef idx="2">
+            <a:schemeClr val="accent1"/>
+          </a:effectRef>
+          <a:fontRef idx="minor">
+            <a:schemeClr val="lt1"/>
+          </a:fontRef>
+        </p:style>
+        <p:txBody>
+          <a:bodyPr rtlCol="0" anchor="ctr"/>
+          <a:lstStyle/>
+          <a:p>
+            <a:pPr algn="ctr"/>
+          </a:p>
+        </p:txBody>
+      </p:sp>
+      <p:sp>
+        <p:nvSpPr>
+          <p:cNvPr id="18" name="TextBox 17"/>
+          <p:cNvSpPr txBox="1"/>
+          <p:nvPr/>
+        </p:nvSpPr>
+        <p:spPr>
+          <a:xfrm>
+            <a:off x="457200" y="5029200"/>
+            <a:ext cx="1828800" cy="731520"/>
+          </a:xfrm>
+          <a:prstGeom prst="rect">
+            <a:avLst/>
+          </a:prstGeom>
+          <a:noFill/>
+        </p:spPr>
+        <p:txBody>
+          <a:bodyPr wrap="square">
+            <a:spAutoFit/>
+          </a:bodyPr>
+          <a:lstStyle/>
+          <a:p>
+            <a:pPr algn="ctr">
+              <a:defRPr sz="1700" b="1">
+                <a:solidFill>
+                  <a:srgbClr val="FFFFFF"/>
+                </a:solidFill>
+                <a:latin typeface="Arial"/>
+              </a:defRPr>
+            </a:pPr>
+            <a:r>
+              <a:t>Next</a:t>
+            </a:r>
+          </a:p>
+        </p:txBody>
+      </p:sp>
+      <p:sp>
+        <p:nvSpPr>
+          <p:cNvPr id="19" name="TextBox 18"/>
+          <p:cNvSpPr txBox="1"/>
+          <p:nvPr/>
+        </p:nvSpPr>
+        <p:spPr>
+          <a:xfrm>
+            <a:off x="2468880" y="4992624"/>
+            <a:ext cx="9262872" cy="704088"/>
+          </a:xfrm>
+          <a:prstGeom prst="rect">
+            <a:avLst/>
+          </a:prstGeom>
+          <a:noFill/>
+        </p:spPr>
+        <p:txBody>
+          <a:bodyPr wrap="square">
+            <a:spAutoFit/>
+          </a:bodyPr>
+          <a:lstStyle/>
+          <a:p>
+            <a:pPr algn="l">
+              <a:defRPr sz="1600" b="0">
+                <a:solidFill>
+                  <a:srgbClr val="D6E4F0"/>
+                </a:solidFill>
+                <a:latin typeface="Arial"/>
+              </a:defRPr>
+            </a:pPr>
+            <a:r>
+              <a:t>Scaling study, resolution generalisation, cost analysis, physical interpretation</a:t>
+            </a:r>
+          </a:p>
+        </p:txBody>
+      </p:sp>
+      <p:sp>
+        <p:nvSpPr>
+          <p:cNvPr id="20" name="Rectangle 19"/>
+          <p:cNvSpPr/>
+          <p:nvPr/>
+        </p:nvSpPr>
+        <p:spPr>
+          <a:xfrm>
+            <a:off x="0" y="6291072"/>
+            <a:ext cx="12188952" cy="566928"/>
+          </a:xfrm>
+          <a:prstGeom prst="rect">
+            <a:avLst/>
+          </a:prstGeom>
+          <a:solidFill>
+            <a:srgbClr val="1F4E79"/>
+          </a:solidFill>
+          <a:ln w="15240">
+            <a:noFill/>
+          </a:ln>
+        </p:spPr>
+        <p:style>
+          <a:lnRef idx="1">
+            <a:schemeClr val="accent1"/>
+          </a:lnRef>
+          <a:fillRef idx="3">
+            <a:schemeClr val="accent1"/>
+          </a:fillRef>
+          <a:effectRef idx="2">
+            <a:schemeClr val="accent1"/>
+          </a:effectRef>
+          <a:fontRef idx="minor">
+            <a:schemeClr val="lt1"/>
+          </a:fontRef>
+        </p:style>
+        <p:txBody>
+          <a:bodyPr rtlCol="0" anchor="ctr"/>
+          <a:lstStyle/>
+          <a:p>
+            <a:pPr algn="ctr"/>
+          </a:p>
+        </p:txBody>
+      </p:sp>
+      <p:sp>
+        <p:nvSpPr>
+          <p:cNvPr id="21" name="TextBox 20"/>
+          <p:cNvSpPr txBox="1"/>
+          <p:nvPr/>
+        </p:nvSpPr>
+        <p:spPr>
+          <a:xfrm>
+            <a:off x="457200" y="6355080"/>
+            <a:ext cx="11274552" cy="420624"/>
+          </a:xfrm>
+          <a:prstGeom prst="rect">
+            <a:avLst/>
+          </a:prstGeom>
+          <a:noFill/>
+        </p:spPr>
+        <p:txBody>
+          <a:bodyPr wrap="square">
+            <a:spAutoFit/>
+          </a:bodyPr>
+          <a:lstStyle/>
+          <a:p>
+            <a:pPr algn="ctr">
+              <a:defRPr sz="1900" b="0">
+                <a:solidFill>
+                  <a:srgbClr val="FFFFFF"/>
+                </a:solidFill>
+                <a:latin typeface="Arial"/>
+              </a:defRPr>
+            </a:pPr>
+            <a:r>
+              <a:t>Thank you  -  Questions welcome</a:t>
             </a:r>
           </a:p>
         </p:txBody>
@@ -3463,7 +4259,7 @@
           <a:lstStyle/>
           <a:p>
             <a:pPr algn="l">
-              <a:defRPr sz="3200" b="1">
+              <a:defRPr sz="3000" b="1">
                 <a:solidFill>
                   <a:srgbClr val="FFFFFF"/>
                 </a:solidFill>
@@ -3507,7 +4303,7 @@
               </a:defRPr>
             </a:pPr>
             <a:r>
-              <a:t>Recap of the Parametric PDE Challenge</a:t>
+              <a:t>Learning the solution operator of the 2D Darcy flow equation</a:t>
             </a:r>
           </a:p>
         </p:txBody>
@@ -3586,7 +4382,7 @@
               </a:defRPr>
             </a:pPr>
             <a:r>
-              <a:t>AE646 Stage 2 Interim Evaluation</a:t>
+              <a:t>AE646 Stage 2 Interim Evaluation  |  Team PINNacles</a:t>
             </a:r>
           </a:p>
         </p:txBody>
@@ -3622,7 +4418,7 @@
               </a:defRPr>
             </a:pPr>
             <a:r>
-              <a:t>2 / 8</a:t>
+              <a:t>2 / 10</a:t>
             </a:r>
           </a:p>
         </p:txBody>
@@ -3635,8 +4431,8 @@
         </p:nvSpPr>
         <p:spPr>
           <a:xfrm>
-            <a:off x="411480" y="1417320"/>
-            <a:ext cx="11365992" cy="5029200"/>
+            <a:off x="411480" y="1371600"/>
+            <a:ext cx="11365992" cy="5074920"/>
           </a:xfrm>
           <a:prstGeom prst="rect">
             <a:avLst/>
@@ -3680,8 +4476,8 @@
         </p:nvSpPr>
         <p:spPr>
           <a:xfrm>
-            <a:off x="685800" y="1691640"/>
-            <a:ext cx="10817352" cy="365760"/>
+            <a:off x="640080" y="1508760"/>
+            <a:ext cx="10908792" cy="365760"/>
           </a:xfrm>
           <a:prstGeom prst="rect">
             <a:avLst/>
@@ -3695,7 +4491,7 @@
           <a:lstStyle/>
           <a:p>
             <a:pPr algn="l">
-              <a:defRPr sz="2000" b="1">
+              <a:defRPr sz="1900" b="1">
                 <a:solidFill>
                   <a:srgbClr val="1A2E4A"/>
                 </a:solidFill>
@@ -3703,7 +4499,7 @@
               </a:defRPr>
             </a:pPr>
             <a:r>
-              <a:t>2D Darcy Flow Equation</a:t>
+              <a:t>Governing equation and goal</a:t>
             </a:r>
           </a:p>
         </p:txBody>
@@ -3716,8 +4512,8 @@
         </p:nvSpPr>
         <p:spPr>
           <a:xfrm>
-            <a:off x="685800" y="2148840"/>
-            <a:ext cx="10817352" cy="365760"/>
+            <a:off x="685800" y="2057400"/>
+            <a:ext cx="10817352" cy="411480"/>
           </a:xfrm>
           <a:prstGeom prst="rect">
             <a:avLst/>
@@ -3731,15 +4527,15 @@
           <a:lstStyle/>
           <a:p>
             <a:pPr algn="l">
-              <a:defRPr sz="1800" b="0">
-                <a:solidFill>
-                  <a:srgbClr val="2C3E50"/>
-                </a:solidFill>
-                <a:latin typeface="Arial"/>
-              </a:defRPr>
-            </a:pPr>
-            <a:r>
-              <a:t>-div(κ(x,y) ∇u(x,y)) = f(x,y)</a:t>
+              <a:defRPr sz="2000" b="1">
+                <a:solidFill>
+                  <a:srgbClr val="1F4E79"/>
+                </a:solidFill>
+                <a:latin typeface="Arial"/>
+              </a:defRPr>
+            </a:pPr>
+            <a:r>
+              <a:t>-div( κ(x,y) ∇u(x,y) ) = f(x,y)   on (0,1)²,    u = 0 on the boundary,   f = 1</a:t>
             </a:r>
           </a:p>
         </p:txBody>
@@ -3752,8 +4548,8 @@
         </p:nvSpPr>
         <p:spPr>
           <a:xfrm>
-            <a:off x="685800" y="2788920"/>
-            <a:ext cx="10817352" cy="365760"/>
+            <a:off x="685800" y="2743200"/>
+            <a:ext cx="10817352" cy="3291840"/>
           </a:xfrm>
           <a:prstGeom prst="rect">
             <a:avLst/>
@@ -3766,8 +4562,11 @@
           </a:bodyPr>
           <a:lstStyle/>
           <a:p>
-            <a:pPr algn="l">
-              <a:defRPr sz="1600" b="0">
+            <a:pPr>
+              <a:spcAft>
+                <a:spcPts val="800"/>
+              </a:spcAft>
+              <a:defRPr sz="1800">
                 <a:solidFill>
                   <a:srgbClr val="2C3E50"/>
                 </a:solidFill>
@@ -3775,35 +4574,15 @@
               </a:defRPr>
             </a:pPr>
             <a:r>
-              <a:t>• Goal: Learn the mapping from permeability field (κ) to pressure field (u).</a:t>
-            </a:r>
-          </a:p>
-        </p:txBody>
-      </p:sp>
-      <p:sp>
-        <p:nvSpPr>
-          <p:cNvPr id="14" name="TextBox 13"/>
-          <p:cNvSpPr txBox="1"/>
-          <p:nvPr/>
-        </p:nvSpPr>
-        <p:spPr>
-          <a:xfrm>
-            <a:off x="685800" y="3246120"/>
-            <a:ext cx="10817352" cy="365760"/>
-          </a:xfrm>
-          <a:prstGeom prst="rect">
-            <a:avLst/>
-          </a:prstGeom>
-          <a:noFill/>
-        </p:spPr>
-        <p:txBody>
-          <a:bodyPr wrap="square">
-            <a:spAutoFit/>
-          </a:bodyPr>
-          <a:lstStyle/>
-          <a:p>
-            <a:pPr algn="l">
-              <a:defRPr sz="1600" b="0">
+              <a:t>•  κ(x,y): piecewise-constant permeability, values in {0.1, 1.0};  u(x,y): steady pressure field.</a:t>
+            </a:r>
+          </a:p>
+          <a:p>
+            <a:pPr>
+              <a:spcAft>
+                <a:spcPts val="800"/>
+              </a:spcAft>
+              <a:defRPr sz="1800">
                 <a:solidFill>
                   <a:srgbClr val="2C3E50"/>
                 </a:solidFill>
@@ -3811,35 +4590,15 @@
               </a:defRPr>
             </a:pPr>
             <a:r>
-              <a:t>• Traditional solvers (FDM/FEM) are too slow for repeated queries.</a:t>
-            </a:r>
-          </a:p>
-        </p:txBody>
-      </p:sp>
-      <p:sp>
-        <p:nvSpPr>
-          <p:cNvPr id="15" name="TextBox 14"/>
-          <p:cNvSpPr txBox="1"/>
-          <p:nvPr/>
-        </p:nvSpPr>
-        <p:spPr>
-          <a:xfrm>
-            <a:off x="685800" y="3703320"/>
-            <a:ext cx="10817352" cy="365760"/>
-          </a:xfrm>
-          <a:prstGeom prst="rect">
-            <a:avLst/>
-          </a:prstGeom>
-          <a:noFill/>
-        </p:spPr>
-        <p:txBody>
-          <a:bodyPr wrap="square">
-            <a:spAutoFit/>
-          </a:bodyPr>
-          <a:lstStyle/>
-          <a:p>
-            <a:pPr algn="l">
-              <a:defRPr sz="1600" b="0">
+              <a:t>•  Goal: learn the operator  G : κ → u  once, then predict for any new κ in milliseconds.</a:t>
+            </a:r>
+          </a:p>
+          <a:p>
+            <a:pPr>
+              <a:spcAft>
+                <a:spcPts val="800"/>
+              </a:spcAft>
+              <a:defRPr sz="1800">
                 <a:solidFill>
                   <a:srgbClr val="2C3E50"/>
                 </a:solidFill>
@@ -3847,7 +4606,23 @@
               </a:defRPr>
             </a:pPr>
             <a:r>
-              <a:t>• Solution: Operator Learning (surrogate modelling).</a:t>
+              <a:t>•  Numerical solvers (FDM / FEM) must re-solve the PDE for every new κ: too slow for optimisation, UQ, control.</a:t>
+            </a:r>
+          </a:p>
+          <a:p>
+            <a:pPr>
+              <a:spcAft>
+                <a:spcPts val="800"/>
+              </a:spcAft>
+              <a:defRPr sz="1800">
+                <a:solidFill>
+                  <a:srgbClr val="2C3E50"/>
+                </a:solidFill>
+                <a:latin typeface="Arial"/>
+              </a:defRPr>
+            </a:pPr>
+            <a:r>
+              <a:t>•  Project theme #8: operator learning for parametric PDEs.  Baseline: MLP.  SciML model: Fourier Neural Operator (FNO).</a:t>
             </a:r>
           </a:p>
         </p:txBody>
@@ -4022,7 +4797,7 @@
           <a:lstStyle/>
           <a:p>
             <a:pPr algn="l">
-              <a:defRPr sz="3200" b="1">
+              <a:defRPr sz="3000" b="1">
                 <a:solidFill>
                   <a:srgbClr val="FFFFFF"/>
                 </a:solidFill>
@@ -4030,7 +4805,7 @@
               </a:defRPr>
             </a:pPr>
             <a:r>
-              <a:t>Workflow: Data Pipeline</a:t>
+              <a:t>Dataset Pipeline and Exploratory Analysis</a:t>
             </a:r>
           </a:p>
         </p:txBody>
@@ -4066,7 +4841,7 @@
               </a:defRPr>
             </a:pPr>
             <a:r>
-              <a:t>Loading and Preprocessing (Completed)</a:t>
+              <a:t>Real PDEBench 2D Darcy Flow (β = 1.0)  -  pipeline completed</a:t>
             </a:r>
           </a:p>
         </p:txBody>
@@ -4145,7 +4920,7 @@
               </a:defRPr>
             </a:pPr>
             <a:r>
-              <a:t>AE646 Stage 2 Interim Evaluation</a:t>
+              <a:t>AE646 Stage 2 Interim Evaluation  |  Team PINNacles</a:t>
             </a:r>
           </a:p>
         </p:txBody>
@@ -4181,7 +4956,7 @@
               </a:defRPr>
             </a:pPr>
             <a:r>
-              <a:t>3 / 8</a:t>
+              <a:t>3 / 10</a:t>
             </a:r>
           </a:p>
         </p:txBody>
@@ -4194,8 +4969,8 @@
         </p:nvSpPr>
         <p:spPr>
           <a:xfrm>
-            <a:off x="411480" y="1417320"/>
-            <a:ext cx="11365992" cy="5029200"/>
+            <a:off x="411480" y="1371600"/>
+            <a:ext cx="4754880" cy="5074920"/>
           </a:xfrm>
           <a:prstGeom prst="rect">
             <a:avLst/>
@@ -4239,8 +5014,8 @@
         </p:nvSpPr>
         <p:spPr>
           <a:xfrm>
-            <a:off x="685800" y="1691640"/>
-            <a:ext cx="10817352" cy="365760"/>
+            <a:off x="640080" y="1508760"/>
+            <a:ext cx="4297680" cy="365760"/>
           </a:xfrm>
           <a:prstGeom prst="rect">
             <a:avLst/>
@@ -4254,7 +5029,7 @@
           <a:lstStyle/>
           <a:p>
             <a:pPr algn="l">
-              <a:defRPr sz="2000" b="1">
+              <a:defRPr sz="1900" b="1">
                 <a:solidFill>
                   <a:srgbClr val="1A2E4A"/>
                 </a:solidFill>
@@ -4262,7 +5037,7 @@
               </a:defRPr>
             </a:pPr>
             <a:r>
-              <a:t>Dataset Generation &amp; Loading</a:t>
+              <a:t>Pipeline</a:t>
             </a:r>
           </a:p>
         </p:txBody>
@@ -4275,8 +5050,8 @@
         </p:nvSpPr>
         <p:spPr>
           <a:xfrm>
-            <a:off x="685800" y="2331720"/>
-            <a:ext cx="10817352" cy="365760"/>
+            <a:off x="594360" y="2011680"/>
+            <a:ext cx="4389120" cy="2468880"/>
           </a:xfrm>
           <a:prstGeom prst="rect">
             <a:avLst/>
@@ -4289,8 +5064,11 @@
           </a:bodyPr>
           <a:lstStyle/>
           <a:p>
-            <a:pPr algn="l">
-              <a:defRPr sz="1600" b="0">
+            <a:pPr>
+              <a:spcAft>
+                <a:spcPts val="600"/>
+              </a:spcAft>
+              <a:defRPr sz="1500">
                 <a:solidFill>
                   <a:srgbClr val="2C3E50"/>
                 </a:solidFill>
@@ -4298,7 +5076,71 @@
               </a:defRPr>
             </a:pPr>
             <a:r>
-              <a:t>• Download: Acquired PDEBench 2D Darcy Flow (10,000 samples).</a:t>
+              <a:t>•  10,000 real samples, 128×128; checksum-verified download</a:t>
+            </a:r>
+          </a:p>
+          <a:p>
+            <a:pPr>
+              <a:spcAft>
+                <a:spcPts val="600"/>
+              </a:spcAft>
+              <a:defRPr sz="1500">
+                <a:solidFill>
+                  <a:srgbClr val="2C3E50"/>
+                </a:solidFill>
+                <a:latin typeface="Arial"/>
+              </a:defRPr>
+            </a:pPr>
+            <a:r>
+              <a:t>•  Reproducible subset (seed 42): 1,000 train/val (900 / 100) + 200 test</a:t>
+            </a:r>
+          </a:p>
+          <a:p>
+            <a:pPr>
+              <a:spcAft>
+                <a:spcPts val="600"/>
+              </a:spcAft>
+              <a:defRPr sz="1500">
+                <a:solidFill>
+                  <a:srgbClr val="2C3E50"/>
+                </a:solidFill>
+                <a:latin typeface="Arial"/>
+              </a:defRPr>
+            </a:pPr>
+            <a:r>
+              <a:t>•  Every 2nd grid point → 64×64; add (x, y) channels → 64×64×3</a:t>
+            </a:r>
+          </a:p>
+          <a:p>
+            <a:pPr>
+              <a:spcAft>
+                <a:spcPts val="600"/>
+              </a:spcAft>
+              <a:defRPr sz="1500">
+                <a:solidFill>
+                  <a:srgbClr val="2C3E50"/>
+                </a:solidFill>
+                <a:latin typeface="Arial"/>
+              </a:defRPr>
+            </a:pPr>
+            <a:r>
+              <a:t>•  Standardise with training-set statistics only</a:t>
+            </a:r>
+          </a:p>
+          <a:p>
+            <a:pPr>
+              <a:spcAft>
+                <a:spcPts val="600"/>
+              </a:spcAft>
+              <a:defRPr sz="1500">
+                <a:solidFill>
+                  <a:srgbClr val="2C3E50"/>
+                </a:solidFill>
+                <a:latin typeface="Arial"/>
+              </a:defRPr>
+            </a:pPr>
+            <a:r>
+              <a:t>•  200 test fields also kept at native 128×128</a:t>
             </a:r>
           </a:p>
         </p:txBody>
@@ -4311,8 +5153,8 @@
         </p:nvSpPr>
         <p:spPr>
           <a:xfrm>
-            <a:off x="685800" y="2788920"/>
-            <a:ext cx="10817352" cy="365760"/>
+            <a:off x="640080" y="4343400"/>
+            <a:ext cx="4297680" cy="320040"/>
           </a:xfrm>
           <a:prstGeom prst="rect">
             <a:avLst/>
@@ -4326,15 +5168,15 @@
           <a:lstStyle/>
           <a:p>
             <a:pPr algn="l">
-              <a:defRPr sz="1600" b="0">
-                <a:solidFill>
-                  <a:srgbClr val="2C3E50"/>
-                </a:solidFill>
-                <a:latin typeface="Arial"/>
-              </a:defRPr>
-            </a:pPr>
-            <a:r>
-              <a:t>• Subsetting: Extracted 1,000 train/val samples and 200 test samples.</a:t>
+              <a:defRPr sz="1700" b="1">
+                <a:solidFill>
+                  <a:srgbClr val="1A2E4A"/>
+                </a:solidFill>
+                <a:latin typeface="Arial"/>
+              </a:defRPr>
+            </a:pPr>
+            <a:r>
+              <a:t>EDA findings</a:t>
             </a:r>
           </a:p>
         </p:txBody>
@@ -4347,8 +5189,8 @@
         </p:nvSpPr>
         <p:spPr>
           <a:xfrm>
-            <a:off x="685800" y="3246120"/>
-            <a:ext cx="10817352" cy="365760"/>
+            <a:off x="594360" y="4709160"/>
+            <a:ext cx="4389120" cy="1737360"/>
           </a:xfrm>
           <a:prstGeom prst="rect">
             <a:avLst/>
@@ -4361,8 +5203,11 @@
           </a:bodyPr>
           <a:lstStyle/>
           <a:p>
-            <a:pPr algn="l">
-              <a:defRPr sz="1600" b="0">
+            <a:pPr>
+              <a:spcAft>
+                <a:spcPts val="400"/>
+              </a:spcAft>
+              <a:defRPr sz="1400">
                 <a:solidFill>
                   <a:srgbClr val="2C3E50"/>
                 </a:solidFill>
@@ -4370,35 +5215,15 @@
               </a:defRPr>
             </a:pPr>
             <a:r>
-              <a:t>• Preprocessing: Downsampled train/val from 128x128 to 64x64.</a:t>
-            </a:r>
-          </a:p>
-        </p:txBody>
-      </p:sp>
-      <p:sp>
-        <p:nvSpPr>
-          <p:cNvPr id="15" name="TextBox 14"/>
-          <p:cNvSpPr txBox="1"/>
-          <p:nvPr/>
-        </p:nvSpPr>
-        <p:spPr>
-          <a:xfrm>
-            <a:off x="685800" y="3703320"/>
-            <a:ext cx="10817352" cy="365760"/>
-          </a:xfrm>
-          <a:prstGeom prst="rect">
-            <a:avLst/>
-          </a:prstGeom>
-          <a:noFill/>
-        </p:spPr>
-        <p:txBody>
-          <a:bodyPr wrap="square">
-            <a:spAutoFit/>
-          </a:bodyPr>
-          <a:lstStyle/>
-          <a:p>
-            <a:pPr algn="l">
-              <a:defRPr sz="1600" b="0">
+              <a:t>•  κ exactly bimodal; high-κ area fraction 0.48 ± 0.21</a:t>
+            </a:r>
+          </a:p>
+          <a:p>
+            <a:pPr>
+              <a:spcAft>
+                <a:spcPts val="400"/>
+              </a:spcAft>
+              <a:defRPr sz="1400">
                 <a:solidFill>
                   <a:srgbClr val="2C3E50"/>
                 </a:solidFill>
@@ -4406,35 +5231,15 @@
               </a:defRPr>
             </a:pPr>
             <a:r>
-              <a:t>• Spatial Features: Concatenated (x, y) coordinates to form (64, 64, 3) inputs.</a:t>
-            </a:r>
-          </a:p>
-        </p:txBody>
-      </p:sp>
-      <p:sp>
-        <p:nvSpPr>
-          <p:cNvPr id="16" name="TextBox 15"/>
-          <p:cNvSpPr txBox="1"/>
-          <p:nvPr/>
-        </p:nvSpPr>
-        <p:spPr>
-          <a:xfrm>
-            <a:off x="685800" y="4160520"/>
-            <a:ext cx="10817352" cy="365760"/>
-          </a:xfrm>
-          <a:prstGeom prst="rect">
-            <a:avLst/>
-          </a:prstGeom>
-          <a:noFill/>
-        </p:spPr>
-        <p:txBody>
-          <a:bodyPr wrap="square">
-            <a:spAutoFit/>
-          </a:bodyPr>
-          <a:lstStyle/>
-          <a:p>
-            <a:pPr algn="l">
-              <a:defRPr sz="1600" b="0">
+              <a:t>•  180/200 test fields: a single high-κ blob; 2/200 exactly uniform</a:t>
+            </a:r>
+          </a:p>
+          <a:p>
+            <a:pPr>
+              <a:spcAft>
+                <a:spcPts val="400"/>
+              </a:spcAft>
+              <a:defRPr sz="1400">
                 <a:solidFill>
                   <a:srgbClr val="2C3E50"/>
                 </a:solidFill>
@@ -4442,11 +5247,80 @@
               </a:defRPr>
             </a:pPr>
             <a:r>
-              <a:t>• Normalisation: Computed statistics strictly from the training set.</a:t>
-            </a:r>
-          </a:p>
-        </p:txBody>
-      </p:sp>
+              <a:t>•  Peak pressure varies widely (0.1 to &gt;1.0)</a:t>
+            </a:r>
+          </a:p>
+        </p:txBody>
+      </p:sp>
+      <p:sp>
+        <p:nvSpPr>
+          <p:cNvPr id="15" name="Rectangle 14"/>
+          <p:cNvSpPr/>
+          <p:nvPr/>
+        </p:nvSpPr>
+        <p:spPr>
+          <a:xfrm>
+            <a:off x="5303520" y="1371600"/>
+            <a:ext cx="6473952" cy="5074920"/>
+          </a:xfrm>
+          <a:prstGeom prst="rect">
+            <a:avLst/>
+          </a:prstGeom>
+          <a:solidFill>
+            <a:srgbClr val="FFFFFF"/>
+          </a:solidFill>
+          <a:ln w="12700">
+            <a:solidFill>
+              <a:srgbClr val="D6E4F0"/>
+            </a:solidFill>
+          </a:ln>
+        </p:spPr>
+        <p:style>
+          <a:lnRef idx="1">
+            <a:schemeClr val="accent1"/>
+          </a:lnRef>
+          <a:fillRef idx="3">
+            <a:schemeClr val="accent1"/>
+          </a:fillRef>
+          <a:effectRef idx="2">
+            <a:schemeClr val="accent1"/>
+          </a:effectRef>
+          <a:fontRef idx="minor">
+            <a:schemeClr val="lt1"/>
+          </a:fontRef>
+        </p:style>
+        <p:txBody>
+          <a:bodyPr rtlCol="0" anchor="ctr"/>
+          <a:lstStyle/>
+          <a:p>
+            <a:pPr algn="ctr"/>
+          </a:p>
+        </p:txBody>
+      </p:sp>
+      <p:pic>
+        <p:nvPicPr>
+          <p:cNvPr id="16" name="Picture 15" descr="fig8_eda_dataset.png"/>
+          <p:cNvPicPr>
+            <a:picLocks noChangeAspect="1"/>
+          </p:cNvPicPr>
+          <p:nvPr/>
+        </p:nvPicPr>
+        <p:blipFill>
+          <a:blip r:embed="rId2"/>
+          <a:stretch>
+            <a:fillRect/>
+          </a:stretch>
+        </p:blipFill>
+        <p:spPr>
+          <a:xfrm>
+            <a:off x="5394960" y="1478419"/>
+            <a:ext cx="6291072" cy="4861282"/>
+          </a:xfrm>
+          <a:prstGeom prst="rect">
+            <a:avLst/>
+          </a:prstGeom>
+        </p:spPr>
+      </p:pic>
     </p:spTree>
   </p:cSld>
   <p:clrMapOvr>
@@ -4617,7 +5491,7 @@
           <a:lstStyle/>
           <a:p>
             <a:pPr algn="l">
-              <a:defRPr sz="3200" b="1">
+              <a:defRPr sz="3000" b="1">
                 <a:solidFill>
                   <a:srgbClr val="FFFFFF"/>
                 </a:solidFill>
@@ -4625,7 +5499,7 @@
               </a:defRPr>
             </a:pPr>
             <a:r>
-              <a:t>Workflow: Code &amp; Architecture</a:t>
+              <a:t>Preprocessing Ablation (MLP)</a:t>
             </a:r>
           </a:p>
         </p:txBody>
@@ -4661,7 +5535,7 @@
               </a:defRPr>
             </a:pPr>
             <a:r>
-              <a:t>MLP Baseline and Initial SciML Models</a:t>
+              <a:t>One choice varied at a time; 3 seeds each; same split and target</a:t>
             </a:r>
           </a:p>
         </p:txBody>
@@ -4740,7 +5614,7 @@
               </a:defRPr>
             </a:pPr>
             <a:r>
-              <a:t>AE646 Stage 2 Interim Evaluation</a:t>
+              <a:t>AE646 Stage 2 Interim Evaluation  |  Team PINNacles</a:t>
             </a:r>
           </a:p>
         </p:txBody>
@@ -4776,7 +5650,7 @@
               </a:defRPr>
             </a:pPr>
             <a:r>
-              <a:t>4 / 8</a:t>
+              <a:t>4 / 10</a:t>
             </a:r>
           </a:p>
         </p:txBody>
@@ -4789,8 +5663,8 @@
         </p:nvSpPr>
         <p:spPr>
           <a:xfrm>
-            <a:off x="411480" y="1417320"/>
-            <a:ext cx="11365992" cy="5029200"/>
+            <a:off x="411480" y="1371600"/>
+            <a:ext cx="6766560" cy="5074920"/>
           </a:xfrm>
           <a:prstGeom prst="rect">
             <a:avLst/>
@@ -4826,16 +5700,85 @@
           </a:p>
         </p:txBody>
       </p:sp>
-      <p:sp>
-        <p:nvSpPr>
-          <p:cNvPr id="11" name="TextBox 10"/>
+      <p:pic>
+        <p:nvPicPr>
+          <p:cNvPr id="11" name="Picture 10" descr="fig10_preprocess_ablation.png"/>
+          <p:cNvPicPr>
+            <a:picLocks noChangeAspect="1"/>
+          </p:cNvPicPr>
+          <p:nvPr/>
+        </p:nvPicPr>
+        <p:blipFill>
+          <a:blip r:embed="rId2"/>
+          <a:stretch>
+            <a:fillRect/>
+          </a:stretch>
+        </p:blipFill>
+        <p:spPr>
+          <a:xfrm>
+            <a:off x="502920" y="2057400"/>
+            <a:ext cx="6583680" cy="3703319"/>
+          </a:xfrm>
+          <a:prstGeom prst="rect">
+            <a:avLst/>
+          </a:prstGeom>
+        </p:spPr>
+      </p:pic>
+      <p:sp>
+        <p:nvSpPr>
+          <p:cNvPr id="12" name="Rectangle 11"/>
+          <p:cNvSpPr/>
+          <p:nvPr/>
+        </p:nvSpPr>
+        <p:spPr>
+          <a:xfrm>
+            <a:off x="7315200" y="1371600"/>
+            <a:ext cx="4462272" cy="5074920"/>
+          </a:xfrm>
+          <a:prstGeom prst="rect">
+            <a:avLst/>
+          </a:prstGeom>
+          <a:solidFill>
+            <a:srgbClr val="FFFFFF"/>
+          </a:solidFill>
+          <a:ln w="12700">
+            <a:solidFill>
+              <a:srgbClr val="D6E4F0"/>
+            </a:solidFill>
+          </a:ln>
+        </p:spPr>
+        <p:style>
+          <a:lnRef idx="1">
+            <a:schemeClr val="accent1"/>
+          </a:lnRef>
+          <a:fillRef idx="3">
+            <a:schemeClr val="accent1"/>
+          </a:fillRef>
+          <a:effectRef idx="2">
+            <a:schemeClr val="accent1"/>
+          </a:effectRef>
+          <a:fontRef idx="minor">
+            <a:schemeClr val="lt1"/>
+          </a:fontRef>
+        </p:style>
+        <p:txBody>
+          <a:bodyPr rtlCol="0" anchor="ctr"/>
+          <a:lstStyle/>
+          <a:p>
+            <a:pPr algn="ctr"/>
+          </a:p>
+        </p:txBody>
+      </p:sp>
+      <p:sp>
+        <p:nvSpPr>
+          <p:cNvPr id="13" name="TextBox 12"/>
           <p:cNvSpPr txBox="1"/>
           <p:nvPr/>
         </p:nvSpPr>
         <p:spPr>
           <a:xfrm>
-            <a:off x="685800" y="1691640"/>
-            <a:ext cx="10817352" cy="365760"/>
+            <a:off x="7543800" y="1508760"/>
+            <a:ext cx="4005072" cy="365760"/>
           </a:xfrm>
           <a:prstGeom prst="rect">
             <a:avLst/>
@@ -4849,7 +5792,7 @@
           <a:lstStyle/>
           <a:p>
             <a:pPr algn="l">
-              <a:defRPr sz="2000" b="1">
+              <a:defRPr sz="1900" b="1">
                 <a:solidFill>
                   <a:srgbClr val="1A2E4A"/>
                 </a:solidFill>
@@ -4857,21 +5800,21 @@
               </a:defRPr>
             </a:pPr>
             <a:r>
-              <a:t>MLP Baseline Implementation</a:t>
-            </a:r>
-          </a:p>
-        </p:txBody>
-      </p:sp>
-      <p:sp>
-        <p:nvSpPr>
-          <p:cNvPr id="12" name="TextBox 11"/>
+              <a:t>Result</a:t>
+            </a:r>
+          </a:p>
+        </p:txBody>
+      </p:sp>
+      <p:sp>
+        <p:nvSpPr>
+          <p:cNvPr id="14" name="TextBox 13"/>
           <p:cNvSpPr txBox="1"/>
           <p:nvPr/>
         </p:nvSpPr>
         <p:spPr>
           <a:xfrm>
-            <a:off x="685800" y="2240280"/>
-            <a:ext cx="10817352" cy="365760"/>
+            <a:off x="7498080" y="2011680"/>
+            <a:ext cx="4096512" cy="3840480"/>
           </a:xfrm>
           <a:prstGeom prst="rect">
             <a:avLst/>
@@ -4884,8 +5827,11 @@
           </a:bodyPr>
           <a:lstStyle/>
           <a:p>
-            <a:pPr algn="l">
-              <a:defRPr sz="1600" b="0">
+            <a:pPr>
+              <a:spcAft>
+                <a:spcPts val="800"/>
+              </a:spcAft>
+              <a:defRPr sz="1500">
                 <a:solidFill>
                   <a:srgbClr val="2C3E50"/>
                 </a:solidFill>
@@ -4893,35 +5839,15 @@
               </a:defRPr>
             </a:pPr>
             <a:r>
-              <a:t>• Architecture: Flattens input to 12,288 vector -&gt; 3x2048 hidden layers.</a:t>
-            </a:r>
-          </a:p>
-        </p:txBody>
-      </p:sp>
-      <p:sp>
-        <p:nvSpPr>
-          <p:cNvPr id="13" name="TextBox 12"/>
-          <p:cNvSpPr txBox="1"/>
-          <p:nvPr/>
-        </p:nvSpPr>
-        <p:spPr>
-          <a:xfrm>
-            <a:off x="685800" y="2697480"/>
-            <a:ext cx="10817352" cy="365760"/>
-          </a:xfrm>
-          <a:prstGeom prst="rect">
-            <a:avLst/>
-          </a:prstGeom>
-          <a:noFill/>
-        </p:spPr>
-        <p:txBody>
-          <a:bodyPr wrap="square">
-            <a:spAutoFit/>
-          </a:bodyPr>
-          <a:lstStyle/>
-          <a:p>
-            <a:pPr algn="l">
-              <a:defRPr sz="1600" b="0">
+              <a:t>•  Reference (standardised + coordinates): 0.0842</a:t>
+            </a:r>
+          </a:p>
+          <a:p>
+            <a:pPr>
+              <a:spcAft>
+                <a:spcPts val="800"/>
+              </a:spcAft>
+              <a:defRPr sz="1500">
                 <a:solidFill>
                   <a:srgbClr val="2C3E50"/>
                 </a:solidFill>
@@ -4929,71 +5855,15 @@
               </a:defRPr>
             </a:pPr>
             <a:r>
-              <a:t>• Parameters: ~42.0 Million. No spatial inductive bias.</a:t>
-            </a:r>
-          </a:p>
-        </p:txBody>
-      </p:sp>
-      <p:sp>
-        <p:nvSpPr>
-          <p:cNvPr id="14" name="TextBox 13"/>
-          <p:cNvSpPr txBox="1"/>
-          <p:nvPr/>
-        </p:nvSpPr>
-        <p:spPr>
-          <a:xfrm>
-            <a:off x="685800" y="3429000"/>
-            <a:ext cx="10817352" cy="365760"/>
-          </a:xfrm>
-          <a:prstGeom prst="rect">
-            <a:avLst/>
-          </a:prstGeom>
-          <a:noFill/>
-        </p:spPr>
-        <p:txBody>
-          <a:bodyPr wrap="square">
-            <a:spAutoFit/>
-          </a:bodyPr>
-          <a:lstStyle/>
-          <a:p>
-            <a:pPr algn="l">
-              <a:defRPr sz="2000" b="1">
-                <a:solidFill>
-                  <a:srgbClr val="1A2E4A"/>
-                </a:solidFill>
-                <a:latin typeface="Arial"/>
-              </a:defRPr>
-            </a:pPr>
-            <a:r>
-              <a:t>Fourier Neural Operator (SciML) Implementation</a:t>
-            </a:r>
-          </a:p>
-        </p:txBody>
-      </p:sp>
-      <p:sp>
-        <p:nvSpPr>
-          <p:cNvPr id="15" name="TextBox 14"/>
-          <p:cNvSpPr txBox="1"/>
-          <p:nvPr/>
-        </p:nvSpPr>
-        <p:spPr>
-          <a:xfrm>
-            <a:off x="685800" y="3977640"/>
-            <a:ext cx="10817352" cy="365760"/>
-          </a:xfrm>
-          <a:prstGeom prst="rect">
-            <a:avLst/>
-          </a:prstGeom>
-          <a:noFill/>
-        </p:spPr>
-        <p:txBody>
-          <a:bodyPr wrap="square">
-            <a:spAutoFit/>
-          </a:bodyPr>
-          <a:lstStyle/>
-          <a:p>
-            <a:pPr algn="l">
-              <a:defRPr sz="1600" b="0">
+              <a:t>•  No coordinate channels: 0.0843  (no effect on the MLP)</a:t>
+            </a:r>
+          </a:p>
+          <a:p>
+            <a:pPr>
+              <a:spcAft>
+                <a:spcPts val="800"/>
+              </a:spcAft>
+              <a:defRPr sz="1500">
                 <a:solidFill>
                   <a:srgbClr val="2C3E50"/>
                 </a:solidFill>
@@ -5001,35 +5871,15 @@
               </a:defRPr>
             </a:pPr>
             <a:r>
-              <a:t>• Architecture: Lift to 64 channels -&gt; 4 Spectral Convolutions (modes=12).</a:t>
-            </a:r>
-          </a:p>
-        </p:txBody>
-      </p:sp>
-      <p:sp>
-        <p:nvSpPr>
-          <p:cNvPr id="16" name="TextBox 15"/>
-          <p:cNvSpPr txBox="1"/>
-          <p:nvPr/>
-        </p:nvSpPr>
-        <p:spPr>
-          <a:xfrm>
-            <a:off x="685800" y="4434840"/>
-            <a:ext cx="10817352" cy="365760"/>
-          </a:xfrm>
-          <a:prstGeom prst="rect">
-            <a:avLst/>
-          </a:prstGeom>
-          <a:noFill/>
-        </p:spPr>
-        <p:txBody>
-          <a:bodyPr wrap="square">
-            <a:spAutoFit/>
-          </a:bodyPr>
-          <a:lstStyle/>
-          <a:p>
-            <a:pPr algn="l">
-              <a:defRPr sz="1600" b="0">
+              <a:t>•  No input normalisation: 0.0864</a:t>
+            </a:r>
+          </a:p>
+          <a:p>
+            <a:pPr>
+              <a:spcAft>
+                <a:spcPts val="800"/>
+              </a:spcAft>
+              <a:defRPr sz="1500">
                 <a:solidFill>
                   <a:srgbClr val="2C3E50"/>
                 </a:solidFill>
@@ -5037,35 +5887,15 @@
               </a:defRPr>
             </a:pPr>
             <a:r>
-              <a:t>• Forward Pass: FFT -&gt; Complex MatMul (frequency domain filtering) -&gt; IFFT.</a:t>
-            </a:r>
-          </a:p>
-        </p:txBody>
-      </p:sp>
-      <p:sp>
-        <p:nvSpPr>
-          <p:cNvPr id="17" name="TextBox 16"/>
-          <p:cNvSpPr txBox="1"/>
-          <p:nvPr/>
-        </p:nvSpPr>
-        <p:spPr>
-          <a:xfrm>
-            <a:off x="685800" y="4892040"/>
-            <a:ext cx="10817352" cy="365760"/>
-          </a:xfrm>
-          <a:prstGeom prst="rect">
-            <a:avLst/>
-          </a:prstGeom>
-          <a:noFill/>
-        </p:spPr>
-        <p:txBody>
-          <a:bodyPr wrap="square">
-            <a:spAutoFit/>
-          </a:bodyPr>
-          <a:lstStyle/>
-          <a:p>
-            <a:pPr algn="l">
-              <a:defRPr sz="1600" b="0">
+              <a:t>•  No target normalisation: 0.0917  (+9%)</a:t>
+            </a:r>
+          </a:p>
+          <a:p>
+            <a:pPr>
+              <a:spcAft>
+                <a:spcPts val="800"/>
+              </a:spcAft>
+              <a:defRPr sz="1500">
                 <a:solidFill>
                   <a:srgbClr val="2C3E50"/>
                 </a:solidFill>
@@ -5073,7 +5903,7 @@
               </a:defRPr>
             </a:pPr>
             <a:r>
-              <a:t>• Parameters: ~4.7 Million (Highly parameter-efficient).</a:t>
+              <a:t>•  Target normalisation is the choice that matters; the pipeline choices are justified, not assumed.</a:t>
             </a:r>
           </a:p>
         </p:txBody>
@@ -5248,7 +6078,7 @@
           <a:lstStyle/>
           <a:p>
             <a:pPr algn="l">
-              <a:defRPr sz="3200" b="1">
+              <a:defRPr sz="3000" b="1">
                 <a:solidFill>
                   <a:srgbClr val="FFFFFF"/>
                 </a:solidFill>
@@ -5256,7 +6086,7 @@
               </a:defRPr>
             </a:pPr>
             <a:r>
-              <a:t>Preliminary Quantitative Results</a:t>
+              <a:t>Models and Training</a:t>
             </a:r>
           </a:p>
         </p:txBody>
@@ -5292,7 +6122,7 @@
               </a:defRPr>
             </a:pPr>
             <a:r>
-              <a:t>Relative L2 Error Comparison</a:t>
+              <a:t>MLP baseline and Fourier Neural Operator - both implemented and trained</a:t>
             </a:r>
           </a:p>
         </p:txBody>
@@ -5371,7 +6201,7 @@
               </a:defRPr>
             </a:pPr>
             <a:r>
-              <a:t>AE646 Stage 2 Interim Evaluation</a:t>
+              <a:t>AE646 Stage 2 Interim Evaluation  |  Team PINNacles</a:t>
             </a:r>
           </a:p>
         </p:txBody>
@@ -5407,7 +6237,7 @@
               </a:defRPr>
             </a:pPr>
             <a:r>
-              <a:t>5 / 8</a:t>
+              <a:t>5 / 10</a:t>
             </a:r>
           </a:p>
         </p:txBody>
@@ -5420,8 +6250,8 @@
         </p:nvSpPr>
         <p:spPr>
           <a:xfrm>
-            <a:off x="411480" y="1417320"/>
-            <a:ext cx="11365992" cy="5029200"/>
+            <a:off x="411480" y="1371600"/>
+            <a:ext cx="5545836" cy="3017520"/>
           </a:xfrm>
           <a:prstGeom prst="rect">
             <a:avLst/>
@@ -5465,8 +6295,8 @@
         </p:nvSpPr>
         <p:spPr>
           <a:xfrm>
-            <a:off x="685800" y="1691640"/>
-            <a:ext cx="10817352" cy="365760"/>
+            <a:off x="640080" y="1508760"/>
+            <a:ext cx="5088636" cy="365760"/>
           </a:xfrm>
           <a:prstGeom prst="rect">
             <a:avLst/>
@@ -5480,15 +6310,15 @@
           <a:lstStyle/>
           <a:p>
             <a:pPr algn="l">
-              <a:defRPr sz="2000" b="1">
-                <a:solidFill>
-                  <a:srgbClr val="1A2E4A"/>
-                </a:solidFill>
-                <a:latin typeface="Arial"/>
-              </a:defRPr>
-            </a:pPr>
-            <a:r>
-              <a:t>Model Performance (Physical Units)</a:t>
+              <a:defRPr sz="1900" b="1">
+                <a:solidFill>
+                  <a:srgbClr val="CA6F1E"/>
+                </a:solidFill>
+                <a:latin typeface="Arial"/>
+              </a:defRPr>
+            </a:pPr>
+            <a:r>
+              <a:t>MLP baseline</a:t>
             </a:r>
           </a:p>
         </p:txBody>
@@ -5501,8 +6331,8 @@
         </p:nvSpPr>
         <p:spPr>
           <a:xfrm>
-            <a:off x="685800" y="2331720"/>
-            <a:ext cx="10817352" cy="365760"/>
+            <a:off x="640080" y="2011680"/>
+            <a:ext cx="5088636" cy="2286000"/>
           </a:xfrm>
           <a:prstGeom prst="rect">
             <a:avLst/>
@@ -5515,8 +6345,11 @@
           </a:bodyPr>
           <a:lstStyle/>
           <a:p>
-            <a:pPr algn="l">
-              <a:defRPr sz="1800" b="0">
+            <a:pPr>
+              <a:spcAft>
+                <a:spcPts val="800"/>
+              </a:spcAft>
+              <a:defRPr sz="1800">
                 <a:solidFill>
                   <a:srgbClr val="2C3E50"/>
                 </a:solidFill>
@@ -5524,21 +6357,98 @@
               </a:defRPr>
             </a:pPr>
             <a:r>
-              <a:t>MLP Baseline: Mean Rel L2 = 0.0820 (Params: 42.0M)</a:t>
-            </a:r>
-          </a:p>
-        </p:txBody>
-      </p:sp>
-      <p:sp>
-        <p:nvSpPr>
-          <p:cNvPr id="13" name="TextBox 12"/>
+              <a:t>•  Flatten 64×64×3 → 3 hidden layers × 2048 (GELU) → 64×64</a:t>
+            </a:r>
+          </a:p>
+          <a:p>
+            <a:pPr>
+              <a:spcAft>
+                <a:spcPts val="800"/>
+              </a:spcAft>
+              <a:defRPr sz="1800">
+                <a:solidFill>
+                  <a:srgbClr val="2C3E50"/>
+                </a:solidFill>
+                <a:latin typeface="Arial"/>
+              </a:defRPr>
+            </a:pPr>
+            <a:r>
+              <a:t>•  42.0 M parameters</a:t>
+            </a:r>
+          </a:p>
+          <a:p>
+            <a:pPr>
+              <a:spcAft>
+                <a:spcPts val="800"/>
+              </a:spcAft>
+              <a:defRPr sz="1800">
+                <a:solidFill>
+                  <a:srgbClr val="2C3E50"/>
+                </a:solidFill>
+                <a:latin typeface="Arial"/>
+              </a:defRPr>
+            </a:pPr>
+            <a:r>
+              <a:t>•  No spatial inductive bias; fixed to 64×64 input</a:t>
+            </a:r>
+          </a:p>
+        </p:txBody>
+      </p:sp>
+      <p:sp>
+        <p:nvSpPr>
+          <p:cNvPr id="13" name="Rectangle 12"/>
+          <p:cNvSpPr/>
+          <p:nvPr/>
+        </p:nvSpPr>
+        <p:spPr>
+          <a:xfrm>
+            <a:off x="6231636" y="1371600"/>
+            <a:ext cx="5545836" cy="3017520"/>
+          </a:xfrm>
+          <a:prstGeom prst="rect">
+            <a:avLst/>
+          </a:prstGeom>
+          <a:solidFill>
+            <a:srgbClr val="FFFFFF"/>
+          </a:solidFill>
+          <a:ln w="12700">
+            <a:solidFill>
+              <a:srgbClr val="D6E4F0"/>
+            </a:solidFill>
+          </a:ln>
+        </p:spPr>
+        <p:style>
+          <a:lnRef idx="1">
+            <a:schemeClr val="accent1"/>
+          </a:lnRef>
+          <a:fillRef idx="3">
+            <a:schemeClr val="accent1"/>
+          </a:fillRef>
+          <a:effectRef idx="2">
+            <a:schemeClr val="accent1"/>
+          </a:effectRef>
+          <a:fontRef idx="minor">
+            <a:schemeClr val="lt1"/>
+          </a:fontRef>
+        </p:style>
+        <p:txBody>
+          <a:bodyPr rtlCol="0" anchor="ctr"/>
+          <a:lstStyle/>
+          <a:p>
+            <a:pPr algn="ctr"/>
+          </a:p>
+        </p:txBody>
+      </p:sp>
+      <p:sp>
+        <p:nvSpPr>
+          <p:cNvPr id="14" name="TextBox 13"/>
           <p:cNvSpPr txBox="1"/>
           <p:nvPr/>
         </p:nvSpPr>
         <p:spPr>
           <a:xfrm>
-            <a:off x="685800" y="2880360"/>
-            <a:ext cx="10817352" cy="365760"/>
+            <a:off x="6460236" y="1508760"/>
+            <a:ext cx="5088636" cy="365760"/>
           </a:xfrm>
           <a:prstGeom prst="rect">
             <a:avLst/>
@@ -5552,7 +6462,7 @@
           <a:lstStyle/>
           <a:p>
             <a:pPr algn="l">
-              <a:defRPr sz="1800" b="1">
+              <a:defRPr sz="1900" b="1">
                 <a:solidFill>
                   <a:srgbClr val="1E8B4C"/>
                 </a:solidFill>
@@ -5560,21 +6470,21 @@
               </a:defRPr>
             </a:pPr>
             <a:r>
-              <a:t>FNO Original: Mean Rel L2 = 0.0521 (Params: 4.7M)</a:t>
-            </a:r>
-          </a:p>
-        </p:txBody>
-      </p:sp>
-      <p:sp>
-        <p:nvSpPr>
-          <p:cNvPr id="14" name="TextBox 13"/>
+              <a:t>Fourier Neural Operator (FNO)</a:t>
+            </a:r>
+          </a:p>
+        </p:txBody>
+      </p:sp>
+      <p:sp>
+        <p:nvSpPr>
+          <p:cNvPr id="15" name="TextBox 14"/>
           <p:cNvSpPr txBox="1"/>
           <p:nvPr/>
         </p:nvSpPr>
         <p:spPr>
           <a:xfrm>
-            <a:off x="685800" y="3429000"/>
-            <a:ext cx="10817352" cy="365760"/>
+            <a:off x="6460236" y="2011680"/>
+            <a:ext cx="5088636" cy="2286000"/>
           </a:xfrm>
           <a:prstGeom prst="rect">
             <a:avLst/>
@@ -5587,8 +6497,11 @@
           </a:bodyPr>
           <a:lstStyle/>
           <a:p>
-            <a:pPr algn="l">
-              <a:defRPr sz="1800" b="0">
+            <a:pPr>
+              <a:spcAft>
+                <a:spcPts val="800"/>
+              </a:spcAft>
+              <a:defRPr sz="1800">
                 <a:solidFill>
                   <a:srgbClr val="2C3E50"/>
                 </a:solidFill>
@@ -5596,21 +6509,98 @@
               </a:defRPr>
             </a:pPr>
             <a:r>
-              <a:t>FNO Improved: Mean Rel L2 = 0.0456 (Params: 78.8M)</a:t>
-            </a:r>
-          </a:p>
-        </p:txBody>
-      </p:sp>
-      <p:sp>
-        <p:nvSpPr>
-          <p:cNvPr id="15" name="TextBox 14"/>
+              <a:t>•  Lift 3→64 channels; 4 spectral-convolution blocks</a:t>
+            </a:r>
+          </a:p>
+          <a:p>
+            <a:pPr>
+              <a:spcAft>
+                <a:spcPts val="800"/>
+              </a:spcAft>
+              <a:defRPr sz="1800">
+                <a:solidFill>
+                  <a:srgbClr val="2C3E50"/>
+                </a:solidFill>
+                <a:latin typeface="Arial"/>
+              </a:defRPr>
+            </a:pPr>
+            <a:r>
+              <a:t>•  Each block: FFT → keep 12×12 modes → learned complex weights → inverse FFT, plus 1×1 bypass</a:t>
+            </a:r>
+          </a:p>
+          <a:p>
+            <a:pPr>
+              <a:spcAft>
+                <a:spcPts val="800"/>
+              </a:spcAft>
+              <a:defRPr sz="1800">
+                <a:solidFill>
+                  <a:srgbClr val="2C3E50"/>
+                </a:solidFill>
+                <a:latin typeface="Arial"/>
+              </a:defRPr>
+            </a:pPr>
+            <a:r>
+              <a:t>•  4.7 M parameters (9× fewer than the MLP)</a:t>
+            </a:r>
+          </a:p>
+        </p:txBody>
+      </p:sp>
+      <p:sp>
+        <p:nvSpPr>
+          <p:cNvPr id="16" name="Rectangle 15"/>
+          <p:cNvSpPr/>
+          <p:nvPr/>
+        </p:nvSpPr>
+        <p:spPr>
+          <a:xfrm>
+            <a:off x="411480" y="4572000"/>
+            <a:ext cx="11365992" cy="1828800"/>
+          </a:xfrm>
+          <a:prstGeom prst="rect">
+            <a:avLst/>
+          </a:prstGeom>
+          <a:solidFill>
+            <a:srgbClr val="FFFFFF"/>
+          </a:solidFill>
+          <a:ln w="12700">
+            <a:solidFill>
+              <a:srgbClr val="D6E4F0"/>
+            </a:solidFill>
+          </a:ln>
+        </p:spPr>
+        <p:style>
+          <a:lnRef idx="1">
+            <a:schemeClr val="accent1"/>
+          </a:lnRef>
+          <a:fillRef idx="3">
+            <a:schemeClr val="accent1"/>
+          </a:fillRef>
+          <a:effectRef idx="2">
+            <a:schemeClr val="accent1"/>
+          </a:effectRef>
+          <a:fontRef idx="minor">
+            <a:schemeClr val="lt1"/>
+          </a:fontRef>
+        </p:style>
+        <p:txBody>
+          <a:bodyPr rtlCol="0" anchor="ctr"/>
+          <a:lstStyle/>
+          <a:p>
+            <a:pPr algn="ctr"/>
+          </a:p>
+        </p:txBody>
+      </p:sp>
+      <p:sp>
+        <p:nvSpPr>
+          <p:cNvPr id="17" name="TextBox 16"/>
           <p:cNvSpPr txBox="1"/>
           <p:nvPr/>
         </p:nvSpPr>
         <p:spPr>
           <a:xfrm>
-            <a:off x="685800" y="4160520"/>
-            <a:ext cx="10817352" cy="365760"/>
+            <a:off x="640080" y="4709160"/>
+            <a:ext cx="10908792" cy="365760"/>
           </a:xfrm>
           <a:prstGeom prst="rect">
             <a:avLst/>
@@ -5624,29 +6614,29 @@
           <a:lstStyle/>
           <a:p>
             <a:pPr algn="l">
-              <a:defRPr sz="1800" b="1">
-                <a:solidFill>
-                  <a:srgbClr val="2C3E50"/>
-                </a:solidFill>
-                <a:latin typeface="Arial"/>
-              </a:defRPr>
-            </a:pPr>
-            <a:r>
-              <a:t>Key Observations:</a:t>
-            </a:r>
-          </a:p>
-        </p:txBody>
-      </p:sp>
-      <p:sp>
-        <p:nvSpPr>
-          <p:cNvPr id="16" name="TextBox 15"/>
+              <a:defRPr sz="1900" b="1">
+                <a:solidFill>
+                  <a:srgbClr val="1A2E4A"/>
+                </a:solidFill>
+                <a:latin typeface="Arial"/>
+              </a:defRPr>
+            </a:pPr>
+            <a:r>
+              <a:t>Shared training protocol</a:t>
+            </a:r>
+          </a:p>
+        </p:txBody>
+      </p:sp>
+      <p:sp>
+        <p:nvSpPr>
+          <p:cNvPr id="18" name="TextBox 17"/>
           <p:cNvSpPr txBox="1"/>
           <p:nvPr/>
         </p:nvSpPr>
         <p:spPr>
           <a:xfrm>
-            <a:off x="685800" y="4709160"/>
-            <a:ext cx="10817352" cy="365760"/>
+            <a:off x="640080" y="5074920"/>
+            <a:ext cx="10908792" cy="1280160"/>
           </a:xfrm>
           <a:prstGeom prst="rect">
             <a:avLst/>
@@ -5659,8 +6649,11 @@
           </a:bodyPr>
           <a:lstStyle/>
           <a:p>
-            <a:pPr algn="l">
-              <a:defRPr sz="1600" b="0">
+            <a:pPr>
+              <a:spcAft>
+                <a:spcPts val="600"/>
+              </a:spcAft>
+              <a:defRPr sz="1700">
                 <a:solidFill>
                   <a:srgbClr val="2C3E50"/>
                 </a:solidFill>
@@ -5668,35 +6661,15 @@
               </a:defRPr>
             </a:pPr>
             <a:r>
-              <a:t>• FNO outperforms the MLP by a significant margin using 9x fewer parameters.</a:t>
-            </a:r>
-          </a:p>
-        </p:txBody>
-      </p:sp>
-      <p:sp>
-        <p:nvSpPr>
-          <p:cNvPr id="17" name="TextBox 16"/>
-          <p:cNvSpPr txBox="1"/>
-          <p:nvPr/>
-        </p:nvSpPr>
-        <p:spPr>
-          <a:xfrm>
-            <a:off x="685800" y="5166359"/>
-            <a:ext cx="10817352" cy="365760"/>
-          </a:xfrm>
-          <a:prstGeom prst="rect">
-            <a:avLst/>
-          </a:prstGeom>
-          <a:noFill/>
-        </p:spPr>
-        <p:txBody>
-          <a:bodyPr wrap="square">
-            <a:spAutoFit/>
-          </a:bodyPr>
-          <a:lstStyle/>
-          <a:p>
-            <a:pPr algn="l">
-              <a:defRPr sz="1600" b="0">
+              <a:t>•  AdamW (weight decay 1e-4), peak LR 1e-3, cosine schedule; batch 16; 100 epochs; best-validation checkpoint kept</a:t>
+            </a:r>
+          </a:p>
+          <a:p>
+            <a:pPr>
+              <a:spcAft>
+                <a:spcPts val="600"/>
+              </a:spcAft>
+              <a:defRPr sz="1700">
                 <a:solidFill>
                   <a:srgbClr val="2C3E50"/>
                 </a:solidFill>
@@ -5704,7 +6677,7 @@
               </a:defRPr>
             </a:pPr>
             <a:r>
-              <a:t>• Error histograms show FNO errors concentrated heavily below 0.1.</a:t>
+              <a:t>•  Loss: MSE on standardised pressure.  Reported metric: relative L2 error per sample, in physical units</a:t>
             </a:r>
           </a:p>
         </p:txBody>
@@ -5879,7 +6852,7 @@
           <a:lstStyle/>
           <a:p>
             <a:pPr algn="l">
-              <a:defRPr sz="3200" b="1">
+              <a:defRPr sz="3000" b="1">
                 <a:solidFill>
                   <a:srgbClr val="FFFFFF"/>
                 </a:solidFill>
@@ -5887,7 +6860,7 @@
               </a:defRPr>
             </a:pPr>
             <a:r>
-              <a:t>Interim Zero-Shot &amp; Speed Benchmarks</a:t>
+              <a:t>Baseline Development: Depth and Optimiser</a:t>
             </a:r>
           </a:p>
         </p:txBody>
@@ -5923,7 +6896,7 @@
               </a:defRPr>
             </a:pPr>
             <a:r>
-              <a:t>Super-resolution and Latency</a:t>
+              <a:t>Real re-trained variants on the same data, split and schedule</a:t>
             </a:r>
           </a:p>
         </p:txBody>
@@ -6002,7 +6975,7 @@
               </a:defRPr>
             </a:pPr>
             <a:r>
-              <a:t>AE646 Stage 2 Interim Evaluation</a:t>
+              <a:t>AE646 Stage 2 Interim Evaluation  |  Team PINNacles</a:t>
             </a:r>
           </a:p>
         </p:txBody>
@@ -6038,7 +7011,7 @@
               </a:defRPr>
             </a:pPr>
             <a:r>
-              <a:t>6 / 8</a:t>
+              <a:t>6 / 10</a:t>
             </a:r>
           </a:p>
         </p:txBody>
@@ -6051,8 +7024,8 @@
         </p:nvSpPr>
         <p:spPr>
           <a:xfrm>
-            <a:off x="411480" y="1417320"/>
-            <a:ext cx="11365992" cy="5029200"/>
+            <a:off x="411480" y="1371600"/>
+            <a:ext cx="6766560" cy="5074920"/>
           </a:xfrm>
           <a:prstGeom prst="rect">
             <a:avLst/>
@@ -6088,16 +7061,85 @@
           </a:p>
         </p:txBody>
       </p:sp>
-      <p:sp>
-        <p:nvSpPr>
-          <p:cNvPr id="11" name="TextBox 10"/>
+      <p:pic>
+        <p:nvPicPr>
+          <p:cNvPr id="11" name="Picture 10" descr="fig7_mlp_ablation.png"/>
+          <p:cNvPicPr>
+            <a:picLocks noChangeAspect="1"/>
+          </p:cNvPicPr>
+          <p:nvPr/>
+        </p:nvPicPr>
+        <p:blipFill>
+          <a:blip r:embed="rId2"/>
+          <a:stretch>
+            <a:fillRect/>
+          </a:stretch>
+        </p:blipFill>
+        <p:spPr>
+          <a:xfrm>
+            <a:off x="502920" y="2057400"/>
+            <a:ext cx="6583680" cy="3703319"/>
+          </a:xfrm>
+          <a:prstGeom prst="rect">
+            <a:avLst/>
+          </a:prstGeom>
+        </p:spPr>
+      </p:pic>
+      <p:sp>
+        <p:nvSpPr>
+          <p:cNvPr id="12" name="Rectangle 11"/>
+          <p:cNvSpPr/>
+          <p:nvPr/>
+        </p:nvSpPr>
+        <p:spPr>
+          <a:xfrm>
+            <a:off x="7315200" y="1371600"/>
+            <a:ext cx="4462272" cy="5074920"/>
+          </a:xfrm>
+          <a:prstGeom prst="rect">
+            <a:avLst/>
+          </a:prstGeom>
+          <a:solidFill>
+            <a:srgbClr val="FFFFFF"/>
+          </a:solidFill>
+          <a:ln w="12700">
+            <a:solidFill>
+              <a:srgbClr val="D6E4F0"/>
+            </a:solidFill>
+          </a:ln>
+        </p:spPr>
+        <p:style>
+          <a:lnRef idx="1">
+            <a:schemeClr val="accent1"/>
+          </a:lnRef>
+          <a:fillRef idx="3">
+            <a:schemeClr val="accent1"/>
+          </a:fillRef>
+          <a:effectRef idx="2">
+            <a:schemeClr val="accent1"/>
+          </a:effectRef>
+          <a:fontRef idx="minor">
+            <a:schemeClr val="lt1"/>
+          </a:fontRef>
+        </p:style>
+        <p:txBody>
+          <a:bodyPr rtlCol="0" anchor="ctr"/>
+          <a:lstStyle/>
+          <a:p>
+            <a:pPr algn="ctr"/>
+          </a:p>
+        </p:txBody>
+      </p:sp>
+      <p:sp>
+        <p:nvSpPr>
+          <p:cNvPr id="13" name="TextBox 12"/>
           <p:cNvSpPr txBox="1"/>
           <p:nvPr/>
         </p:nvSpPr>
         <p:spPr>
           <a:xfrm>
-            <a:off x="685800" y="1691640"/>
-            <a:ext cx="10817352" cy="365760"/>
+            <a:off x="7543800" y="1508760"/>
+            <a:ext cx="4005072" cy="365760"/>
           </a:xfrm>
           <a:prstGeom prst="rect">
             <a:avLst/>
@@ -6111,7 +7153,7 @@
           <a:lstStyle/>
           <a:p>
             <a:pPr algn="l">
-              <a:defRPr sz="2000" b="1">
+              <a:defRPr sz="1900" b="1">
                 <a:solidFill>
                   <a:srgbClr val="1A2E4A"/>
                 </a:solidFill>
@@ -6119,21 +7161,21 @@
               </a:defRPr>
             </a:pPr>
             <a:r>
-              <a:t>Zero-Shot Super-Resolution (128x128)</a:t>
-            </a:r>
-          </a:p>
-        </p:txBody>
-      </p:sp>
-      <p:sp>
-        <p:nvSpPr>
-          <p:cNvPr id="12" name="TextBox 11"/>
+              <a:t>Result</a:t>
+            </a:r>
+          </a:p>
+        </p:txBody>
+      </p:sp>
+      <p:sp>
+        <p:nvSpPr>
+          <p:cNvPr id="14" name="TextBox 13"/>
           <p:cNvSpPr txBox="1"/>
           <p:nvPr/>
         </p:nvSpPr>
         <p:spPr>
           <a:xfrm>
-            <a:off x="685800" y="2331720"/>
-            <a:ext cx="10817352" cy="365760"/>
+            <a:off x="7498080" y="2011680"/>
+            <a:ext cx="4096512" cy="4114800"/>
           </a:xfrm>
           <a:prstGeom prst="rect">
             <a:avLst/>
@@ -6146,8 +7188,11 @@
           </a:bodyPr>
           <a:lstStyle/>
           <a:p>
-            <a:pPr algn="l">
-              <a:defRPr sz="1600" b="0">
+            <a:pPr>
+              <a:spcAft>
+                <a:spcPts val="800"/>
+              </a:spcAft>
+              <a:defRPr sz="1500">
                 <a:solidFill>
                   <a:srgbClr val="2C3E50"/>
                 </a:solidFill>
@@ -6155,35 +7200,15 @@
               </a:defRPr>
             </a:pPr>
             <a:r>
-              <a:t>• Evaluated models on the native 128x128 test set (without retraining).</a:t>
-            </a:r>
-          </a:p>
-        </p:txBody>
-      </p:sp>
-      <p:sp>
-        <p:nvSpPr>
-          <p:cNvPr id="13" name="TextBox 12"/>
-          <p:cNvSpPr txBox="1"/>
-          <p:nvPr/>
-        </p:nvSpPr>
-        <p:spPr>
-          <a:xfrm>
-            <a:off x="685800" y="2788920"/>
-            <a:ext cx="10817352" cy="365760"/>
-          </a:xfrm>
-          <a:prstGeom prst="rect">
-            <a:avLst/>
-          </a:prstGeom>
-          <a:noFill/>
-        </p:spPr>
-        <p:txBody>
-          <a:bodyPr wrap="square">
-            <a:spAutoFit/>
-          </a:bodyPr>
-          <a:lstStyle/>
-          <a:p>
-            <a:pPr algn="l">
-              <a:defRPr sz="1600" b="0">
+              <a:t>•  1 layer: 0.1008    2 layers: 0.0796</a:t>
+            </a:r>
+          </a:p>
+          <a:p>
+            <a:pPr>
+              <a:spcAft>
+                <a:spcPts val="800"/>
+              </a:spcAft>
+              <a:defRPr sz="1500">
                 <a:solidFill>
                   <a:srgbClr val="2C3E50"/>
                 </a:solidFill>
@@ -6191,71 +7216,15 @@
               </a:defRPr>
             </a:pPr>
             <a:r>
-              <a:t>• FNO maintained high accuracy (Rel L2 = 0.0594). MLP cannot perform this task.</a:t>
-            </a:r>
-          </a:p>
-        </p:txBody>
-      </p:sp>
-      <p:sp>
-        <p:nvSpPr>
-          <p:cNvPr id="14" name="TextBox 13"/>
-          <p:cNvSpPr txBox="1"/>
-          <p:nvPr/>
-        </p:nvSpPr>
-        <p:spPr>
-          <a:xfrm>
-            <a:off x="685800" y="3611880"/>
-            <a:ext cx="10817352" cy="365760"/>
-          </a:xfrm>
-          <a:prstGeom prst="rect">
-            <a:avLst/>
-          </a:prstGeom>
-          <a:noFill/>
-        </p:spPr>
-        <p:txBody>
-          <a:bodyPr wrap="square">
-            <a:spAutoFit/>
-          </a:bodyPr>
-          <a:lstStyle/>
-          <a:p>
-            <a:pPr algn="l">
-              <a:defRPr sz="2000" b="1">
-                <a:solidFill>
-                  <a:srgbClr val="1A2E4A"/>
-                </a:solidFill>
-                <a:latin typeface="Arial"/>
-              </a:defRPr>
-            </a:pPr>
-            <a:r>
-              <a:t>Inference Latency (The Speed Paradox)</a:t>
-            </a:r>
-          </a:p>
-        </p:txBody>
-      </p:sp>
-      <p:sp>
-        <p:nvSpPr>
-          <p:cNvPr id="15" name="TextBox 14"/>
-          <p:cNvSpPr txBox="1"/>
-          <p:nvPr/>
-        </p:nvSpPr>
-        <p:spPr>
-          <a:xfrm>
-            <a:off x="685800" y="4160520"/>
-            <a:ext cx="10817352" cy="365760"/>
-          </a:xfrm>
-          <a:prstGeom prst="rect">
-            <a:avLst/>
-          </a:prstGeom>
-          <a:noFill/>
-        </p:spPr>
-        <p:txBody>
-          <a:bodyPr wrap="square">
-            <a:spAutoFit/>
-          </a:bodyPr>
-          <a:lstStyle/>
-          <a:p>
-            <a:pPr algn="l">
-              <a:defRPr sz="1600" b="0">
+              <a:t>•  3 layers (final baseline): 0.0857</a:t>
+            </a:r>
+          </a:p>
+          <a:p>
+            <a:pPr>
+              <a:spcAft>
+                <a:spcPts val="800"/>
+              </a:spcAft>
+              <a:defRPr sz="1500">
                 <a:solidFill>
                   <a:srgbClr val="2C3E50"/>
                 </a:solidFill>
@@ -6263,35 +7232,15 @@
               </a:defRPr>
             </a:pPr>
             <a:r>
-              <a:t>• Both AI models operate in ~1 ms (1000x faster than SciPy FDM solves).</a:t>
-            </a:r>
-          </a:p>
-        </p:txBody>
-      </p:sp>
-      <p:sp>
-        <p:nvSpPr>
-          <p:cNvPr id="16" name="TextBox 15"/>
-          <p:cNvSpPr txBox="1"/>
-          <p:nvPr/>
-        </p:nvSpPr>
-        <p:spPr>
-          <a:xfrm>
-            <a:off x="685800" y="4617720"/>
-            <a:ext cx="10817352" cy="365760"/>
-          </a:xfrm>
-          <a:prstGeom prst="rect">
-            <a:avLst/>
-          </a:prstGeom>
-          <a:noFill/>
-        </p:spPr>
-        <p:txBody>
-          <a:bodyPr wrap="square">
-            <a:spAutoFit/>
-          </a:bodyPr>
-          <a:lstStyle/>
-          <a:p>
-            <a:pPr algn="l">
-              <a:defRPr sz="1600" b="0">
+              <a:t>•  3 layers with SGD+momentum: 0.1209</a:t>
+            </a:r>
+          </a:p>
+          <a:p>
+            <a:pPr>
+              <a:spcAft>
+                <a:spcPts val="800"/>
+              </a:spcAft>
+              <a:defRPr sz="1500">
                 <a:solidFill>
                   <a:srgbClr val="2C3E50"/>
                 </a:solidFill>
@@ -6299,35 +7248,15 @@
               </a:defRPr>
             </a:pPr>
             <a:r>
-              <a:t>• Interestingly, MLP is faster per-sample (0.13ms) than FNO (0.71ms).</a:t>
-            </a:r>
-          </a:p>
-        </p:txBody>
-      </p:sp>
-      <p:sp>
-        <p:nvSpPr>
-          <p:cNvPr id="17" name="TextBox 16"/>
-          <p:cNvSpPr txBox="1"/>
-          <p:nvPr/>
-        </p:nvSpPr>
-        <p:spPr>
-          <a:xfrm>
-            <a:off x="685800" y="5074920"/>
-            <a:ext cx="10817352" cy="365760"/>
-          </a:xfrm>
-          <a:prstGeom prst="rect">
-            <a:avLst/>
-          </a:prstGeom>
-          <a:noFill/>
-        </p:spPr>
-        <p:txBody>
-          <a:bodyPr wrap="square">
-            <a:spAutoFit/>
-          </a:bodyPr>
-          <a:lstStyle/>
-          <a:p>
-            <a:pPr algn="l">
-              <a:defRPr sz="1600" b="0">
+              <a:t>•  SGD is clearly worse: justifies AdamW.</a:t>
+            </a:r>
+          </a:p>
+          <a:p>
+            <a:pPr>
+              <a:spcAft>
+                <a:spcPts val="800"/>
+              </a:spcAft>
+              <a:defRPr sz="1500">
                 <a:solidFill>
                   <a:srgbClr val="2C3E50"/>
                 </a:solidFill>
@@ -6335,35 +7264,15 @@
               </a:defRPr>
             </a:pPr>
             <a:r>
-              <a:t>• Layer-wise profiling: spectral ops (FFT+multiply+IFFT) = 68.4% of FNO's compute;</a:t>
-            </a:r>
-          </a:p>
-        </p:txBody>
-      </p:sp>
-      <p:sp>
-        <p:nvSpPr>
-          <p:cNvPr id="18" name="TextBox 17"/>
-          <p:cNvSpPr txBox="1"/>
-          <p:nvPr/>
-        </p:nvSpPr>
-        <p:spPr>
-          <a:xfrm>
-            <a:off x="685800" y="5440680"/>
-            <a:ext cx="10817352" cy="365760"/>
-          </a:xfrm>
-          <a:prstGeom prst="rect">
-            <a:avLst/>
-          </a:prstGeom>
-          <a:noFill/>
-        </p:spPr>
-        <p:txBody>
-          <a:bodyPr wrap="square">
-            <a:spAutoFit/>
-          </a:bodyPr>
-          <a:lstStyle/>
-          <a:p>
-            <a:pPr algn="l">
-              <a:defRPr sz="1600" b="0">
+              <a:t>•  2 vs 3 layers differ by less than the run-to-run noise (~0.004): treated as equivalent.</a:t>
+            </a:r>
+          </a:p>
+          <a:p>
+            <a:pPr>
+              <a:spcAft>
+                <a:spcPts val="800"/>
+              </a:spcAft>
+              <a:defRPr sz="1500">
                 <a:solidFill>
                   <a:srgbClr val="2C3E50"/>
                 </a:solidFill>
@@ -6371,7 +7280,7 @@
               </a:defRPr>
             </a:pPr>
             <a:r>
-              <a:t>  complex-multiply alone is 41.0% (the single largest component).</a:t>
+              <a:t>•  Baseline was fixed before the study, so it is a fair, not a weakened, comparison for the FNO.</a:t>
             </a:r>
           </a:p>
         </p:txBody>
@@ -6546,7 +7455,7 @@
           <a:lstStyle/>
           <a:p>
             <a:pPr algn="l">
-              <a:defRPr sz="3200" b="1">
+              <a:defRPr sz="3000" b="1">
                 <a:solidFill>
                   <a:srgbClr val="FFFFFF"/>
                 </a:solidFill>
@@ -6554,7 +7463,7 @@
               </a:defRPr>
             </a:pPr>
             <a:r>
-              <a:t>Issues Faced &amp; Next Steps</a:t>
+              <a:t>Preliminary Quantitative Results</a:t>
             </a:r>
           </a:p>
         </p:txBody>
@@ -6590,7 +7499,7 @@
               </a:defRPr>
             </a:pPr>
             <a:r>
-              <a:t>Moving to Stage 3</a:t>
+              <a:t>MLP baseline vs FNO - 200 held-out test samples, relative L2 in physical units</a:t>
             </a:r>
           </a:p>
         </p:txBody>
@@ -6669,7 +7578,7 @@
               </a:defRPr>
             </a:pPr>
             <a:r>
-              <a:t>AE646 Stage 2 Interim Evaluation</a:t>
+              <a:t>AE646 Stage 2 Interim Evaluation  |  Team PINNacles</a:t>
             </a:r>
           </a:p>
         </p:txBody>
@@ -6705,21 +7614,562 @@
               </a:defRPr>
             </a:pPr>
             <a:r>
-              <a:t>7 / 8</a:t>
-            </a:r>
-          </a:p>
-        </p:txBody>
-      </p:sp>
-      <p:sp>
-        <p:nvSpPr>
-          <p:cNvPr id="10" name="Rectangle 9"/>
+              <a:t>7 / 10</a:t>
+            </a:r>
+          </a:p>
+        </p:txBody>
+      </p:sp>
+      <p:graphicFrame>
+        <p:nvGraphicFramePr>
+          <p:cNvPr id="10" name="Table 9"/>
+          <p:cNvGraphicFramePr>
+            <a:graphicFrameLocks noGrp="1"/>
+          </p:cNvGraphicFramePr>
+          <p:nvPr/>
+        </p:nvGraphicFramePr>
+        <p:xfrm>
+          <a:off x="411480" y="1371600"/>
+          <a:ext cx="11365992" cy="1280160"/>
+        </p:xfrm>
+        <a:graphic>
+          <a:graphicData uri="http://schemas.openxmlformats.org/drawingml/2006/table">
+            <a:tbl>
+              <a:tblPr firstRow="1" bandRow="1">
+                <a:tableStyleId>{5C22544A-7EE6-4342-B048-85BDC9FD1C3A}</a:tableStyleId>
+              </a:tblPr>
+              <a:tblGrid>
+                <a:gridCol w="1623713"/>
+                <a:gridCol w="1623713"/>
+                <a:gridCol w="1623713"/>
+                <a:gridCol w="1623713"/>
+                <a:gridCol w="1623713"/>
+                <a:gridCol w="1623713"/>
+                <a:gridCol w="1623714"/>
+              </a:tblGrid>
+              <a:tr h="426720">
+                <a:tc>
+                  <a:txBody>
+                    <a:bodyPr/>
+                    <a:lstStyle/>
+                    <a:p>
+                      <a:pPr algn="l">
+                        <a:defRPr sz="1600" b="1">
+                          <a:solidFill>
+                            <a:srgbClr val="FFFFFF"/>
+                          </a:solidFill>
+                          <a:latin typeface="Arial"/>
+                        </a:defRPr>
+                      </a:pPr>
+                      <a:r>
+                        <a:t>Model</a:t>
+                      </a:r>
+                    </a:p>
+                  </a:txBody>
+                  <a:tcPr>
+                    <a:solidFill>
+                      <a:srgbClr val="1F4E79"/>
+                    </a:solidFill>
+                  </a:tcPr>
+                </a:tc>
+                <a:tc>
+                  <a:txBody>
+                    <a:bodyPr/>
+                    <a:lstStyle/>
+                    <a:p>
+                      <a:pPr algn="ctr">
+                        <a:defRPr sz="1600" b="1">
+                          <a:solidFill>
+                            <a:srgbClr val="FFFFFF"/>
+                          </a:solidFill>
+                          <a:latin typeface="Arial"/>
+                        </a:defRPr>
+                      </a:pPr>
+                      <a:r>
+                        <a:t>Params</a:t>
+                      </a:r>
+                    </a:p>
+                  </a:txBody>
+                  <a:tcPr>
+                    <a:solidFill>
+                      <a:srgbClr val="1F4E79"/>
+                    </a:solidFill>
+                  </a:tcPr>
+                </a:tc>
+                <a:tc>
+                  <a:txBody>
+                    <a:bodyPr/>
+                    <a:lstStyle/>
+                    <a:p>
+                      <a:pPr algn="ctr">
+                        <a:defRPr sz="1600" b="1">
+                          <a:solidFill>
+                            <a:srgbClr val="FFFFFF"/>
+                          </a:solidFill>
+                          <a:latin typeface="Arial"/>
+                        </a:defRPr>
+                      </a:pPr>
+                      <a:r>
+                        <a:t>Mean</a:t>
+                      </a:r>
+                    </a:p>
+                  </a:txBody>
+                  <a:tcPr>
+                    <a:solidFill>
+                      <a:srgbClr val="1F4E79"/>
+                    </a:solidFill>
+                  </a:tcPr>
+                </a:tc>
+                <a:tc>
+                  <a:txBody>
+                    <a:bodyPr/>
+                    <a:lstStyle/>
+                    <a:p>
+                      <a:pPr algn="ctr">
+                        <a:defRPr sz="1600" b="1">
+                          <a:solidFill>
+                            <a:srgbClr val="FFFFFF"/>
+                          </a:solidFill>
+                          <a:latin typeface="Arial"/>
+                        </a:defRPr>
+                      </a:pPr>
+                      <a:r>
+                        <a:t>Median</a:t>
+                      </a:r>
+                    </a:p>
+                  </a:txBody>
+                  <a:tcPr>
+                    <a:solidFill>
+                      <a:srgbClr val="1F4E79"/>
+                    </a:solidFill>
+                  </a:tcPr>
+                </a:tc>
+                <a:tc>
+                  <a:txBody>
+                    <a:bodyPr/>
+                    <a:lstStyle/>
+                    <a:p>
+                      <a:pPr algn="ctr">
+                        <a:defRPr sz="1600" b="1">
+                          <a:solidFill>
+                            <a:srgbClr val="FFFFFF"/>
+                          </a:solidFill>
+                          <a:latin typeface="Arial"/>
+                        </a:defRPr>
+                      </a:pPr>
+                      <a:r>
+                        <a:t>Std</a:t>
+                      </a:r>
+                    </a:p>
+                  </a:txBody>
+                  <a:tcPr>
+                    <a:solidFill>
+                      <a:srgbClr val="1F4E79"/>
+                    </a:solidFill>
+                  </a:tcPr>
+                </a:tc>
+                <a:tc>
+                  <a:txBody>
+                    <a:bodyPr/>
+                    <a:lstStyle/>
+                    <a:p>
+                      <a:pPr algn="ctr">
+                        <a:defRPr sz="1600" b="1">
+                          <a:solidFill>
+                            <a:srgbClr val="FFFFFF"/>
+                          </a:solidFill>
+                          <a:latin typeface="Arial"/>
+                        </a:defRPr>
+                      </a:pPr>
+                      <a:r>
+                        <a:t>Min</a:t>
+                      </a:r>
+                    </a:p>
+                  </a:txBody>
+                  <a:tcPr>
+                    <a:solidFill>
+                      <a:srgbClr val="1F4E79"/>
+                    </a:solidFill>
+                  </a:tcPr>
+                </a:tc>
+                <a:tc>
+                  <a:txBody>
+                    <a:bodyPr/>
+                    <a:lstStyle/>
+                    <a:p>
+                      <a:pPr algn="ctr">
+                        <a:defRPr sz="1600" b="1">
+                          <a:solidFill>
+                            <a:srgbClr val="FFFFFF"/>
+                          </a:solidFill>
+                          <a:latin typeface="Arial"/>
+                        </a:defRPr>
+                      </a:pPr>
+                      <a:r>
+                        <a:t>Max</a:t>
+                      </a:r>
+                    </a:p>
+                  </a:txBody>
+                  <a:tcPr>
+                    <a:solidFill>
+                      <a:srgbClr val="1F4E79"/>
+                    </a:solidFill>
+                  </a:tcPr>
+                </a:tc>
+              </a:tr>
+              <a:tr h="426720">
+                <a:tc>
+                  <a:txBody>
+                    <a:bodyPr/>
+                    <a:lstStyle/>
+                    <a:p>
+                      <a:pPr algn="l">
+                        <a:defRPr sz="1600" b="0">
+                          <a:solidFill>
+                            <a:srgbClr val="2C3E50"/>
+                          </a:solidFill>
+                          <a:latin typeface="Arial"/>
+                        </a:defRPr>
+                      </a:pPr>
+                      <a:r>
+                        <a:t>MLP baseline</a:t>
+                      </a:r>
+                    </a:p>
+                  </a:txBody>
+                  <a:tcPr>
+                    <a:solidFill>
+                      <a:srgbClr val="FFFFFF"/>
+                    </a:solidFill>
+                  </a:tcPr>
+                </a:tc>
+                <a:tc>
+                  <a:txBody>
+                    <a:bodyPr/>
+                    <a:lstStyle/>
+                    <a:p>
+                      <a:pPr algn="ctr">
+                        <a:defRPr sz="1600" b="0">
+                          <a:solidFill>
+                            <a:srgbClr val="2C3E50"/>
+                          </a:solidFill>
+                          <a:latin typeface="Arial"/>
+                        </a:defRPr>
+                      </a:pPr>
+                      <a:r>
+                        <a:t>42.0 M</a:t>
+                      </a:r>
+                    </a:p>
+                  </a:txBody>
+                  <a:tcPr>
+                    <a:solidFill>
+                      <a:srgbClr val="FFFFFF"/>
+                    </a:solidFill>
+                  </a:tcPr>
+                </a:tc>
+                <a:tc>
+                  <a:txBody>
+                    <a:bodyPr/>
+                    <a:lstStyle/>
+                    <a:p>
+                      <a:pPr algn="ctr">
+                        <a:defRPr sz="1600" b="0">
+                          <a:solidFill>
+                            <a:srgbClr val="2C3E50"/>
+                          </a:solidFill>
+                          <a:latin typeface="Arial"/>
+                        </a:defRPr>
+                      </a:pPr>
+                      <a:r>
+                        <a:t>0.0820</a:t>
+                      </a:r>
+                    </a:p>
+                  </a:txBody>
+                  <a:tcPr>
+                    <a:solidFill>
+                      <a:srgbClr val="FFFFFF"/>
+                    </a:solidFill>
+                  </a:tcPr>
+                </a:tc>
+                <a:tc>
+                  <a:txBody>
+                    <a:bodyPr/>
+                    <a:lstStyle/>
+                    <a:p>
+                      <a:pPr algn="ctr">
+                        <a:defRPr sz="1600" b="0">
+                          <a:solidFill>
+                            <a:srgbClr val="2C3E50"/>
+                          </a:solidFill>
+                          <a:latin typeface="Arial"/>
+                        </a:defRPr>
+                      </a:pPr>
+                      <a:r>
+                        <a:t>0.0695</a:t>
+                      </a:r>
+                    </a:p>
+                  </a:txBody>
+                  <a:tcPr>
+                    <a:solidFill>
+                      <a:srgbClr val="FFFFFF"/>
+                    </a:solidFill>
+                  </a:tcPr>
+                </a:tc>
+                <a:tc>
+                  <a:txBody>
+                    <a:bodyPr/>
+                    <a:lstStyle/>
+                    <a:p>
+                      <a:pPr algn="ctr">
+                        <a:defRPr sz="1600" b="0">
+                          <a:solidFill>
+                            <a:srgbClr val="2C3E50"/>
+                          </a:solidFill>
+                          <a:latin typeface="Arial"/>
+                        </a:defRPr>
+                      </a:pPr>
+                      <a:r>
+                        <a:t>0.0456</a:t>
+                      </a:r>
+                    </a:p>
+                  </a:txBody>
+                  <a:tcPr>
+                    <a:solidFill>
+                      <a:srgbClr val="FFFFFF"/>
+                    </a:solidFill>
+                  </a:tcPr>
+                </a:tc>
+                <a:tc>
+                  <a:txBody>
+                    <a:bodyPr/>
+                    <a:lstStyle/>
+                    <a:p>
+                      <a:pPr algn="ctr">
+                        <a:defRPr sz="1600" b="0">
+                          <a:solidFill>
+                            <a:srgbClr val="2C3E50"/>
+                          </a:solidFill>
+                          <a:latin typeface="Arial"/>
+                        </a:defRPr>
+                      </a:pPr>
+                      <a:r>
+                        <a:t>0.0325</a:t>
+                      </a:r>
+                    </a:p>
+                  </a:txBody>
+                  <a:tcPr>
+                    <a:solidFill>
+                      <a:srgbClr val="FFFFFF"/>
+                    </a:solidFill>
+                  </a:tcPr>
+                </a:tc>
+                <a:tc>
+                  <a:txBody>
+                    <a:bodyPr/>
+                    <a:lstStyle/>
+                    <a:p>
+                      <a:pPr algn="ctr">
+                        <a:defRPr sz="1600" b="0">
+                          <a:solidFill>
+                            <a:srgbClr val="2C3E50"/>
+                          </a:solidFill>
+                          <a:latin typeface="Arial"/>
+                        </a:defRPr>
+                      </a:pPr>
+                      <a:r>
+                        <a:t>0.3367</a:t>
+                      </a:r>
+                    </a:p>
+                  </a:txBody>
+                  <a:tcPr>
+                    <a:solidFill>
+                      <a:srgbClr val="FFFFFF"/>
+                    </a:solidFill>
+                  </a:tcPr>
+                </a:tc>
+              </a:tr>
+              <a:tr h="426720">
+                <a:tc>
+                  <a:txBody>
+                    <a:bodyPr/>
+                    <a:lstStyle/>
+                    <a:p>
+                      <a:pPr algn="l">
+                        <a:defRPr sz="1600" b="0">
+                          <a:solidFill>
+                            <a:srgbClr val="2C3E50"/>
+                          </a:solidFill>
+                          <a:latin typeface="Arial"/>
+                        </a:defRPr>
+                      </a:pPr>
+                      <a:r>
+                        <a:t>FNO</a:t>
+                      </a:r>
+                    </a:p>
+                  </a:txBody>
+                  <a:tcPr>
+                    <a:solidFill>
+                      <a:srgbClr val="D6E4F0"/>
+                    </a:solidFill>
+                  </a:tcPr>
+                </a:tc>
+                <a:tc>
+                  <a:txBody>
+                    <a:bodyPr/>
+                    <a:lstStyle/>
+                    <a:p>
+                      <a:pPr algn="ctr">
+                        <a:defRPr sz="1600" b="0">
+                          <a:solidFill>
+                            <a:srgbClr val="2C3E50"/>
+                          </a:solidFill>
+                          <a:latin typeface="Arial"/>
+                        </a:defRPr>
+                      </a:pPr>
+                      <a:r>
+                        <a:t>4.7 M</a:t>
+                      </a:r>
+                    </a:p>
+                  </a:txBody>
+                  <a:tcPr>
+                    <a:solidFill>
+                      <a:srgbClr val="D6E4F0"/>
+                    </a:solidFill>
+                  </a:tcPr>
+                </a:tc>
+                <a:tc>
+                  <a:txBody>
+                    <a:bodyPr/>
+                    <a:lstStyle/>
+                    <a:p>
+                      <a:pPr algn="ctr">
+                        <a:defRPr sz="1600" b="1">
+                          <a:solidFill>
+                            <a:srgbClr val="2C3E50"/>
+                          </a:solidFill>
+                          <a:latin typeface="Arial"/>
+                        </a:defRPr>
+                      </a:pPr>
+                      <a:r>
+                        <a:t>0.0521</a:t>
+                      </a:r>
+                    </a:p>
+                  </a:txBody>
+                  <a:tcPr>
+                    <a:solidFill>
+                      <a:srgbClr val="D6E4F0"/>
+                    </a:solidFill>
+                  </a:tcPr>
+                </a:tc>
+                <a:tc>
+                  <a:txBody>
+                    <a:bodyPr/>
+                    <a:lstStyle/>
+                    <a:p>
+                      <a:pPr algn="ctr">
+                        <a:defRPr sz="1600" b="1">
+                          <a:solidFill>
+                            <a:srgbClr val="2C3E50"/>
+                          </a:solidFill>
+                          <a:latin typeface="Arial"/>
+                        </a:defRPr>
+                      </a:pPr>
+                      <a:r>
+                        <a:t>0.0398</a:t>
+                      </a:r>
+                    </a:p>
+                  </a:txBody>
+                  <a:tcPr>
+                    <a:solidFill>
+                      <a:srgbClr val="D6E4F0"/>
+                    </a:solidFill>
+                  </a:tcPr>
+                </a:tc>
+                <a:tc>
+                  <a:txBody>
+                    <a:bodyPr/>
+                    <a:lstStyle/>
+                    <a:p>
+                      <a:pPr algn="ctr">
+                        <a:defRPr sz="1600" b="0">
+                          <a:solidFill>
+                            <a:srgbClr val="2C3E50"/>
+                          </a:solidFill>
+                          <a:latin typeface="Arial"/>
+                        </a:defRPr>
+                      </a:pPr>
+                      <a:r>
+                        <a:t>0.0451</a:t>
+                      </a:r>
+                    </a:p>
+                  </a:txBody>
+                  <a:tcPr>
+                    <a:solidFill>
+                      <a:srgbClr val="D6E4F0"/>
+                    </a:solidFill>
+                  </a:tcPr>
+                </a:tc>
+                <a:tc>
+                  <a:txBody>
+                    <a:bodyPr/>
+                    <a:lstStyle/>
+                    <a:p>
+                      <a:pPr algn="ctr">
+                        <a:defRPr sz="1600" b="1">
+                          <a:solidFill>
+                            <a:srgbClr val="2C3E50"/>
+                          </a:solidFill>
+                          <a:latin typeface="Arial"/>
+                        </a:defRPr>
+                      </a:pPr>
+                      <a:r>
+                        <a:t>0.0155</a:t>
+                      </a:r>
+                    </a:p>
+                  </a:txBody>
+                  <a:tcPr>
+                    <a:solidFill>
+                      <a:srgbClr val="D6E4F0"/>
+                    </a:solidFill>
+                  </a:tcPr>
+                </a:tc>
+                <a:tc>
+                  <a:txBody>
+                    <a:bodyPr/>
+                    <a:lstStyle/>
+                    <a:p>
+                      <a:pPr algn="ctr">
+                        <a:defRPr sz="1600" b="0">
+                          <a:solidFill>
+                            <a:srgbClr val="2C3E50"/>
+                          </a:solidFill>
+                          <a:latin typeface="Arial"/>
+                        </a:defRPr>
+                      </a:pPr>
+                      <a:r>
+                        <a:t>0.3467</a:t>
+                      </a:r>
+                    </a:p>
+                  </a:txBody>
+                  <a:tcPr>
+                    <a:solidFill>
+                      <a:srgbClr val="D6E4F0"/>
+                    </a:solidFill>
+                  </a:tcPr>
+                </a:tc>
+              </a:tr>
+            </a:tbl>
+          </a:graphicData>
+        </a:graphic>
+      </p:graphicFrame>
+      <p:sp>
+        <p:nvSpPr>
+          <p:cNvPr id="11" name="Rectangle 10"/>
           <p:cNvSpPr/>
           <p:nvPr/>
         </p:nvSpPr>
         <p:spPr>
           <a:xfrm>
-            <a:off x="411480" y="1417320"/>
-            <a:ext cx="11365992" cy="5029200"/>
+            <a:off x="411480" y="2834640"/>
+            <a:ext cx="6035040" cy="3520440"/>
           </a:xfrm>
           <a:prstGeom prst="rect">
             <a:avLst/>
@@ -6755,16 +8205,85 @@
           </a:p>
         </p:txBody>
       </p:sp>
-      <p:sp>
-        <p:nvSpPr>
-          <p:cNvPr id="11" name="TextBox 10"/>
+      <p:pic>
+        <p:nvPicPr>
+          <p:cNvPr id="12" name="Picture 11" descr="fig1_error_histogram.png"/>
+          <p:cNvPicPr>
+            <a:picLocks noChangeAspect="1"/>
+          </p:cNvPicPr>
+          <p:nvPr/>
+        </p:nvPicPr>
+        <p:blipFill>
+          <a:blip r:embed="rId2"/>
+          <a:stretch>
+            <a:fillRect/>
+          </a:stretch>
+        </p:blipFill>
+        <p:spPr>
+          <a:xfrm>
+            <a:off x="502920" y="2968026"/>
+            <a:ext cx="5852160" cy="3253667"/>
+          </a:xfrm>
+          <a:prstGeom prst="rect">
+            <a:avLst/>
+          </a:prstGeom>
+        </p:spPr>
+      </p:pic>
+      <p:sp>
+        <p:nvSpPr>
+          <p:cNvPr id="13" name="Rectangle 12"/>
+          <p:cNvSpPr/>
+          <p:nvPr/>
+        </p:nvSpPr>
+        <p:spPr>
+          <a:xfrm>
+            <a:off x="6583680" y="2834640"/>
+            <a:ext cx="5193792" cy="3520440"/>
+          </a:xfrm>
+          <a:prstGeom prst="rect">
+            <a:avLst/>
+          </a:prstGeom>
+          <a:solidFill>
+            <a:srgbClr val="FFFFFF"/>
+          </a:solidFill>
+          <a:ln w="12700">
+            <a:solidFill>
+              <a:srgbClr val="D6E4F0"/>
+            </a:solidFill>
+          </a:ln>
+        </p:spPr>
+        <p:style>
+          <a:lnRef idx="1">
+            <a:schemeClr val="accent1"/>
+          </a:lnRef>
+          <a:fillRef idx="3">
+            <a:schemeClr val="accent1"/>
+          </a:fillRef>
+          <a:effectRef idx="2">
+            <a:schemeClr val="accent1"/>
+          </a:effectRef>
+          <a:fontRef idx="minor">
+            <a:schemeClr val="lt1"/>
+          </a:fontRef>
+        </p:style>
+        <p:txBody>
+          <a:bodyPr rtlCol="0" anchor="ctr"/>
+          <a:lstStyle/>
+          <a:p>
+            <a:pPr algn="ctr"/>
+          </a:p>
+        </p:txBody>
+      </p:sp>
+      <p:sp>
+        <p:nvSpPr>
+          <p:cNvPr id="14" name="TextBox 13"/>
           <p:cNvSpPr txBox="1"/>
           <p:nvPr/>
         </p:nvSpPr>
         <p:spPr>
           <a:xfrm>
-            <a:off x="685800" y="1691640"/>
-            <a:ext cx="10817352" cy="365760"/>
+            <a:off x="6812280" y="2971800"/>
+            <a:ext cx="4736592" cy="365760"/>
           </a:xfrm>
           <a:prstGeom prst="rect">
             <a:avLst/>
@@ -6778,29 +8297,29 @@
           <a:lstStyle/>
           <a:p>
             <a:pPr algn="l">
-              <a:defRPr sz="2000" b="1">
-                <a:solidFill>
-                  <a:srgbClr val="1A2E4A"/>
-                </a:solidFill>
-                <a:latin typeface="Arial"/>
-              </a:defRPr>
-            </a:pPr>
-            <a:r>
-              <a:t>Issues &amp; Limitations Identified</a:t>
-            </a:r>
-          </a:p>
-        </p:txBody>
-      </p:sp>
-      <p:sp>
-        <p:nvSpPr>
-          <p:cNvPr id="12" name="TextBox 11"/>
+              <a:defRPr sz="1900" b="1">
+                <a:solidFill>
+                  <a:srgbClr val="1E8B4C"/>
+                </a:solidFill>
+                <a:latin typeface="Arial"/>
+              </a:defRPr>
+            </a:pPr>
+            <a:r>
+              <a:t>Observations</a:t>
+            </a:r>
+          </a:p>
+        </p:txBody>
+      </p:sp>
+      <p:sp>
+        <p:nvSpPr>
+          <p:cNvPr id="15" name="TextBox 14"/>
           <p:cNvSpPr txBox="1"/>
           <p:nvPr/>
         </p:nvSpPr>
         <p:spPr>
           <a:xfrm>
-            <a:off x="685800" y="2331720"/>
-            <a:ext cx="10817352" cy="365760"/>
+            <a:off x="6766560" y="3474720"/>
+            <a:ext cx="4828032" cy="2743200"/>
           </a:xfrm>
           <a:prstGeom prst="rect">
             <a:avLst/>
@@ -6813,8 +8332,11 @@
           </a:bodyPr>
           <a:lstStyle/>
           <a:p>
-            <a:pPr algn="l">
-              <a:defRPr sz="1600" b="0">
+            <a:pPr>
+              <a:spcAft>
+                <a:spcPts val="800"/>
+              </a:spcAft>
+              <a:defRPr sz="1500">
                 <a:solidFill>
                   <a:srgbClr val="2C3E50"/>
                 </a:solidFill>
@@ -6822,35 +8344,15 @@
               </a:defRPr>
             </a:pPr>
             <a:r>
-              <a:t>• Issue: Near-uniform permeability samples cause model over-prediction.</a:t>
-            </a:r>
-          </a:p>
-        </p:txBody>
-      </p:sp>
-      <p:sp>
-        <p:nvSpPr>
-          <p:cNvPr id="13" name="TextBox 12"/>
-          <p:cNvSpPr txBox="1"/>
-          <p:nvPr/>
-        </p:nvSpPr>
-        <p:spPr>
-          <a:xfrm>
-            <a:off x="685800" y="2788920"/>
-            <a:ext cx="10817352" cy="365760"/>
-          </a:xfrm>
-          <a:prstGeom prst="rect">
-            <a:avLst/>
-          </a:prstGeom>
-          <a:noFill/>
-        </p:spPr>
-        <p:txBody>
-          <a:bodyPr wrap="square">
-            <a:spAutoFit/>
-          </a:bodyPr>
-          <a:lstStyle/>
-          <a:p>
-            <a:pPr algn="l">
-              <a:defRPr sz="1600" b="0">
+              <a:t>•  FNO: 37% lower mean error with 9× fewer parameters</a:t>
+            </a:r>
+          </a:p>
+          <a:p>
+            <a:pPr>
+              <a:spcAft>
+                <a:spcPts val="800"/>
+              </a:spcAft>
+              <a:defRPr sz="1500">
                 <a:solidFill>
                   <a:srgbClr val="2C3E50"/>
                 </a:solidFill>
@@ -6858,71 +8360,15 @@
               </a:defRPr>
             </a:pPr>
             <a:r>
-              <a:t>• Cause: The dataset's Gaussian random field generation heavily favours blobby structures.</a:t>
-            </a:r>
-          </a:p>
-        </p:txBody>
-      </p:sp>
-      <p:sp>
-        <p:nvSpPr>
-          <p:cNvPr id="14" name="TextBox 13"/>
-          <p:cNvSpPr txBox="1"/>
-          <p:nvPr/>
-        </p:nvSpPr>
-        <p:spPr>
-          <a:xfrm>
-            <a:off x="685800" y="3611880"/>
-            <a:ext cx="10817352" cy="365760"/>
-          </a:xfrm>
-          <a:prstGeom prst="rect">
-            <a:avLst/>
-          </a:prstGeom>
-          <a:noFill/>
-        </p:spPr>
-        <p:txBody>
-          <a:bodyPr wrap="square">
-            <a:spAutoFit/>
-          </a:bodyPr>
-          <a:lstStyle/>
-          <a:p>
-            <a:pPr algn="l">
-              <a:defRPr sz="2000" b="1">
-                <a:solidFill>
-                  <a:srgbClr val="1A2E4A"/>
-                </a:solidFill>
-                <a:latin typeface="Arial"/>
-              </a:defRPr>
-            </a:pPr>
-            <a:r>
-              <a:t>Next Steps for Stage 3</a:t>
-            </a:r>
-          </a:p>
-        </p:txBody>
-      </p:sp>
-      <p:sp>
-        <p:nvSpPr>
-          <p:cNvPr id="15" name="TextBox 14"/>
-          <p:cNvSpPr txBox="1"/>
-          <p:nvPr/>
-        </p:nvSpPr>
-        <p:spPr>
-          <a:xfrm>
-            <a:off x="685800" y="4160520"/>
-            <a:ext cx="10817352" cy="365760"/>
-          </a:xfrm>
-          <a:prstGeom prst="rect">
-            <a:avLst/>
-          </a:prstGeom>
-          <a:noFill/>
-        </p:spPr>
-        <p:txBody>
-          <a:bodyPr wrap="square">
-            <a:spAutoFit/>
-          </a:bodyPr>
-          <a:lstStyle/>
-          <a:p>
-            <a:pPr algn="l">
-              <a:defRPr sz="1600" b="0">
+              <a:t>•  Both error distributions are right-skewed: most samples &lt; 0.1, a small tail up to ~0.35</a:t>
+            </a:r>
+          </a:p>
+          <a:p>
+            <a:pPr>
+              <a:spcAft>
+                <a:spcPts val="800"/>
+              </a:spcAft>
+              <a:defRPr sz="1500">
                 <a:solidFill>
                   <a:srgbClr val="2C3E50"/>
                 </a:solidFill>
@@ -6930,79 +8376,7 @@
               </a:defRPr>
             </a:pPr>
             <a:r>
-              <a:t>• Complete extensive hyperparameter ablations (modes, widths).</a:t>
-            </a:r>
-          </a:p>
-        </p:txBody>
-      </p:sp>
-      <p:sp>
-        <p:nvSpPr>
-          <p:cNvPr id="16" name="TextBox 15"/>
-          <p:cNvSpPr txBox="1"/>
-          <p:nvPr/>
-        </p:nvSpPr>
-        <p:spPr>
-          <a:xfrm>
-            <a:off x="685800" y="4617720"/>
-            <a:ext cx="10817352" cy="365760"/>
-          </a:xfrm>
-          <a:prstGeom prst="rect">
-            <a:avLst/>
-          </a:prstGeom>
-          <a:noFill/>
-        </p:spPr>
-        <p:txBody>
-          <a:bodyPr wrap="square">
-            <a:spAutoFit/>
-          </a:bodyPr>
-          <a:lstStyle/>
-          <a:p>
-            <a:pPr algn="l">
-              <a:defRPr sz="1600" b="0">
-                <a:solidFill>
-                  <a:srgbClr val="2C3E50"/>
-                </a:solidFill>
-                <a:latin typeface="Arial"/>
-              </a:defRPr>
-            </a:pPr>
-            <a:r>
-              <a:t>• Finalise quantitative plots (Efficiency Pareto Front, Error Distributions).</a:t>
-            </a:r>
-          </a:p>
-        </p:txBody>
-      </p:sp>
-      <p:sp>
-        <p:nvSpPr>
-          <p:cNvPr id="17" name="TextBox 16"/>
-          <p:cNvSpPr txBox="1"/>
-          <p:nvPr/>
-        </p:nvSpPr>
-        <p:spPr>
-          <a:xfrm>
-            <a:off x="685800" y="5074920"/>
-            <a:ext cx="10817352" cy="365760"/>
-          </a:xfrm>
-          <a:prstGeom prst="rect">
-            <a:avLst/>
-          </a:prstGeom>
-          <a:noFill/>
-        </p:spPr>
-        <p:txBody>
-          <a:bodyPr wrap="square">
-            <a:spAutoFit/>
-          </a:bodyPr>
-          <a:lstStyle/>
-          <a:p>
-            <a:pPr algn="l">
-              <a:defRPr sz="1600" b="0">
-                <a:solidFill>
-                  <a:srgbClr val="2C3E50"/>
-                </a:solidFill>
-                <a:latin typeface="Arial"/>
-              </a:defRPr>
-            </a:pPr>
-            <a:r>
-              <a:t>• Wrap up the Stage 3 Final Report with detailed physical interpretations.</a:t>
+              <a:t>•  FNO's gain is in the bulk of the distribution; the worst-case errors of the two models are similar</a:t>
             </a:r>
           </a:p>
         </p:txBody>
@@ -7040,6 +8414,49 @@
             <a:avLst/>
           </a:prstGeom>
           <a:solidFill>
+            <a:srgbClr val="F4F6F9"/>
+          </a:solidFill>
+          <a:ln w="15240">
+            <a:noFill/>
+          </a:ln>
+        </p:spPr>
+        <p:style>
+          <a:lnRef idx="1">
+            <a:schemeClr val="accent1"/>
+          </a:lnRef>
+          <a:fillRef idx="3">
+            <a:schemeClr val="accent1"/>
+          </a:fillRef>
+          <a:effectRef idx="2">
+            <a:schemeClr val="accent1"/>
+          </a:effectRef>
+          <a:fontRef idx="minor">
+            <a:schemeClr val="lt1"/>
+          </a:fontRef>
+        </p:style>
+        <p:txBody>
+          <a:bodyPr rtlCol="0" anchor="ctr"/>
+          <a:lstStyle/>
+          <a:p>
+            <a:pPr algn="ctr"/>
+          </a:p>
+        </p:txBody>
+      </p:sp>
+      <p:sp>
+        <p:nvSpPr>
+          <p:cNvPr id="3" name="Rectangle 2"/>
+          <p:cNvSpPr/>
+          <p:nvPr/>
+        </p:nvSpPr>
+        <p:spPr>
+          <a:xfrm>
+            <a:off x="0" y="0"/>
+            <a:ext cx="12188952" cy="1051560"/>
+          </a:xfrm>
+          <a:prstGeom prst="rect">
+            <a:avLst/>
+          </a:prstGeom>
+          <a:solidFill>
             <a:srgbClr val="1A2E4A"/>
           </a:solidFill>
           <a:ln w="15240">
@@ -7070,14 +8487,14 @@
       </p:sp>
       <p:sp>
         <p:nvSpPr>
-          <p:cNvPr id="3" name="Rectangle 2"/>
+          <p:cNvPr id="4" name="Rectangle 3"/>
           <p:cNvSpPr/>
           <p:nvPr/>
         </p:nvSpPr>
         <p:spPr>
           <a:xfrm>
-            <a:off x="0" y="1024128"/>
-            <a:ext cx="12188952" cy="64008"/>
+            <a:off x="0" y="1051560"/>
+            <a:ext cx="12188952" cy="73152"/>
           </a:xfrm>
           <a:prstGeom prst="rect">
             <a:avLst/>
@@ -7113,14 +8530,14 @@
       </p:sp>
       <p:sp>
         <p:nvSpPr>
-          <p:cNvPr id="4" name="TextBox 3"/>
+          <p:cNvPr id="5" name="TextBox 4"/>
           <p:cNvSpPr txBox="1"/>
           <p:nvPr/>
         </p:nvSpPr>
         <p:spPr>
           <a:xfrm>
-            <a:off x="548640" y="164592"/>
-            <a:ext cx="11091672" cy="777240"/>
+            <a:off x="457200" y="164592"/>
+            <a:ext cx="11274552" cy="502920"/>
           </a:xfrm>
           <a:prstGeom prst="rect">
             <a:avLst/>
@@ -7134,7 +8551,7 @@
           <a:lstStyle/>
           <a:p>
             <a:pPr algn="l">
-              <a:defRPr sz="3600" b="1">
+              <a:defRPr sz="3000" b="1">
                 <a:solidFill>
                   <a:srgbClr val="FFFFFF"/>
                 </a:solidFill>
@@ -7142,21 +8559,529 @@
               </a:defRPr>
             </a:pPr>
             <a:r>
-              <a:t>Summary</a:t>
-            </a:r>
-          </a:p>
-        </p:txBody>
-      </p:sp>
-      <p:sp>
-        <p:nvSpPr>
-          <p:cNvPr id="5" name="Rectangle 4"/>
+              <a:t>FNO Predictions and a Failure Case</a:t>
+            </a:r>
+          </a:p>
+        </p:txBody>
+      </p:sp>
+      <p:sp>
+        <p:nvSpPr>
+          <p:cNvPr id="6" name="TextBox 5"/>
+          <p:cNvSpPr txBox="1"/>
+          <p:nvPr/>
+        </p:nvSpPr>
+        <p:spPr>
+          <a:xfrm>
+            <a:off x="475488" y="658368"/>
+            <a:ext cx="11274552" cy="320040"/>
+          </a:xfrm>
+          <a:prstGeom prst="rect">
+            <a:avLst/>
+          </a:prstGeom>
+          <a:noFill/>
+        </p:spPr>
+        <p:txBody>
+          <a:bodyPr wrap="square">
+            <a:spAutoFit/>
+          </a:bodyPr>
+          <a:lstStyle/>
+          <a:p>
+            <a:pPr algn="l">
+              <a:defRPr sz="1600" b="0">
+                <a:solidFill>
+                  <a:srgbClr val="D6E4F0"/>
+                </a:solidFill>
+                <a:latin typeface="Arial"/>
+              </a:defRPr>
+            </a:pPr>
+            <a:r>
+              <a:t>Best, median and worst test sample (rows)  -  κ | target | prediction | absolute error</a:t>
+            </a:r>
+          </a:p>
+        </p:txBody>
+      </p:sp>
+      <p:sp>
+        <p:nvSpPr>
+          <p:cNvPr id="7" name="Rectangle 6"/>
           <p:cNvSpPr/>
           <p:nvPr/>
         </p:nvSpPr>
         <p:spPr>
           <a:xfrm>
-            <a:off x="457200" y="1371600"/>
-            <a:ext cx="1828800" cy="822960"/>
+            <a:off x="0" y="6537960"/>
+            <a:ext cx="12188952" cy="320040"/>
+          </a:xfrm>
+          <a:prstGeom prst="rect">
+            <a:avLst/>
+          </a:prstGeom>
+          <a:solidFill>
+            <a:srgbClr val="1A2E4A"/>
+          </a:solidFill>
+          <a:ln w="15240">
+            <a:noFill/>
+          </a:ln>
+        </p:spPr>
+        <p:style>
+          <a:lnRef idx="1">
+            <a:schemeClr val="accent1"/>
+          </a:lnRef>
+          <a:fillRef idx="3">
+            <a:schemeClr val="accent1"/>
+          </a:fillRef>
+          <a:effectRef idx="2">
+            <a:schemeClr val="accent1"/>
+          </a:effectRef>
+          <a:fontRef idx="minor">
+            <a:schemeClr val="lt1"/>
+          </a:fontRef>
+        </p:style>
+        <p:txBody>
+          <a:bodyPr rtlCol="0" anchor="ctr"/>
+          <a:lstStyle/>
+          <a:p>
+            <a:pPr algn="ctr"/>
+          </a:p>
+        </p:txBody>
+      </p:sp>
+      <p:sp>
+        <p:nvSpPr>
+          <p:cNvPr id="8" name="TextBox 7"/>
+          <p:cNvSpPr txBox="1"/>
+          <p:nvPr/>
+        </p:nvSpPr>
+        <p:spPr>
+          <a:xfrm>
+            <a:off x="411480" y="6565392"/>
+            <a:ext cx="11365992" cy="274320"/>
+          </a:xfrm>
+          <a:prstGeom prst="rect">
+            <a:avLst/>
+          </a:prstGeom>
+          <a:noFill/>
+        </p:spPr>
+        <p:txBody>
+          <a:bodyPr wrap="square">
+            <a:spAutoFit/>
+          </a:bodyPr>
+          <a:lstStyle/>
+          <a:p>
+            <a:pPr algn="l">
+              <a:defRPr sz="1200" b="0">
+                <a:solidFill>
+                  <a:srgbClr val="D6E4F0"/>
+                </a:solidFill>
+                <a:latin typeface="Arial"/>
+              </a:defRPr>
+            </a:pPr>
+            <a:r>
+              <a:t>AE646 Stage 2 Interim Evaluation  |  Team PINNacles</a:t>
+            </a:r>
+          </a:p>
+        </p:txBody>
+      </p:sp>
+      <p:sp>
+        <p:nvSpPr>
+          <p:cNvPr id="9" name="TextBox 8"/>
+          <p:cNvSpPr txBox="1"/>
+          <p:nvPr/>
+        </p:nvSpPr>
+        <p:spPr>
+          <a:xfrm>
+            <a:off x="10817352" y="6565392"/>
+            <a:ext cx="914400" cy="274320"/>
+          </a:xfrm>
+          <a:prstGeom prst="rect">
+            <a:avLst/>
+          </a:prstGeom>
+          <a:noFill/>
+        </p:spPr>
+        <p:txBody>
+          <a:bodyPr wrap="square">
+            <a:spAutoFit/>
+          </a:bodyPr>
+          <a:lstStyle/>
+          <a:p>
+            <a:pPr algn="r">
+              <a:defRPr sz="1200" b="1">
+                <a:solidFill>
+                  <a:srgbClr val="FFFFFF"/>
+                </a:solidFill>
+                <a:latin typeface="Arial"/>
+              </a:defRPr>
+            </a:pPr>
+            <a:r>
+              <a:t>8 / 10</a:t>
+            </a:r>
+          </a:p>
+        </p:txBody>
+      </p:sp>
+      <p:sp>
+        <p:nvSpPr>
+          <p:cNvPr id="10" name="Rectangle 9"/>
+          <p:cNvSpPr/>
+          <p:nvPr/>
+        </p:nvSpPr>
+        <p:spPr>
+          <a:xfrm>
+            <a:off x="411480" y="1371600"/>
+            <a:ext cx="7498079" cy="5074920"/>
+          </a:xfrm>
+          <a:prstGeom prst="rect">
+            <a:avLst/>
+          </a:prstGeom>
+          <a:solidFill>
+            <a:srgbClr val="FFFFFF"/>
+          </a:solidFill>
+          <a:ln w="12700">
+            <a:solidFill>
+              <a:srgbClr val="D6E4F0"/>
+            </a:solidFill>
+          </a:ln>
+        </p:spPr>
+        <p:style>
+          <a:lnRef idx="1">
+            <a:schemeClr val="accent1"/>
+          </a:lnRef>
+          <a:fillRef idx="3">
+            <a:schemeClr val="accent1"/>
+          </a:fillRef>
+          <a:effectRef idx="2">
+            <a:schemeClr val="accent1"/>
+          </a:effectRef>
+          <a:fontRef idx="minor">
+            <a:schemeClr val="lt1"/>
+          </a:fontRef>
+        </p:style>
+        <p:txBody>
+          <a:bodyPr rtlCol="0" anchor="ctr"/>
+          <a:lstStyle/>
+          <a:p>
+            <a:pPr algn="ctr"/>
+          </a:p>
+        </p:txBody>
+      </p:sp>
+      <p:pic>
+        <p:nvPicPr>
+          <p:cNvPr id="11" name="Picture 10" descr="fig_sample_predictions.png"/>
+          <p:cNvPicPr>
+            <a:picLocks noChangeAspect="1"/>
+          </p:cNvPicPr>
+          <p:nvPr/>
+        </p:nvPicPr>
+        <p:blipFill>
+          <a:blip r:embed="rId2"/>
+          <a:stretch>
+            <a:fillRect/>
+          </a:stretch>
+        </p:blipFill>
+        <p:spPr>
+          <a:xfrm>
+            <a:off x="838560" y="1463040"/>
+            <a:ext cx="6643919" cy="4892040"/>
+          </a:xfrm>
+          <a:prstGeom prst="rect">
+            <a:avLst/>
+          </a:prstGeom>
+        </p:spPr>
+      </p:pic>
+      <p:sp>
+        <p:nvSpPr>
+          <p:cNvPr id="12" name="Rectangle 11"/>
+          <p:cNvSpPr/>
+          <p:nvPr/>
+        </p:nvSpPr>
+        <p:spPr>
+          <a:xfrm>
+            <a:off x="8046720" y="1371600"/>
+            <a:ext cx="3730752" cy="5074920"/>
+          </a:xfrm>
+          <a:prstGeom prst="rect">
+            <a:avLst/>
+          </a:prstGeom>
+          <a:solidFill>
+            <a:srgbClr val="FFFFFF"/>
+          </a:solidFill>
+          <a:ln w="12700">
+            <a:solidFill>
+              <a:srgbClr val="D6E4F0"/>
+            </a:solidFill>
+          </a:ln>
+        </p:spPr>
+        <p:style>
+          <a:lnRef idx="1">
+            <a:schemeClr val="accent1"/>
+          </a:lnRef>
+          <a:fillRef idx="3">
+            <a:schemeClr val="accent1"/>
+          </a:fillRef>
+          <a:effectRef idx="2">
+            <a:schemeClr val="accent1"/>
+          </a:effectRef>
+          <a:fontRef idx="minor">
+            <a:schemeClr val="lt1"/>
+          </a:fontRef>
+        </p:style>
+        <p:txBody>
+          <a:bodyPr rtlCol="0" anchor="ctr"/>
+          <a:lstStyle/>
+          <a:p>
+            <a:pPr algn="ctr"/>
+          </a:p>
+        </p:txBody>
+      </p:sp>
+      <p:sp>
+        <p:nvSpPr>
+          <p:cNvPr id="13" name="TextBox 12"/>
+          <p:cNvSpPr txBox="1"/>
+          <p:nvPr/>
+        </p:nvSpPr>
+        <p:spPr>
+          <a:xfrm>
+            <a:off x="8275320" y="1508760"/>
+            <a:ext cx="3273552" cy="365760"/>
+          </a:xfrm>
+          <a:prstGeom prst="rect">
+            <a:avLst/>
+          </a:prstGeom>
+          <a:noFill/>
+        </p:spPr>
+        <p:txBody>
+          <a:bodyPr wrap="square">
+            <a:spAutoFit/>
+          </a:bodyPr>
+          <a:lstStyle/>
+          <a:p>
+            <a:pPr algn="l">
+              <a:defRPr sz="1900" b="1">
+                <a:solidFill>
+                  <a:srgbClr val="CA6F1E"/>
+                </a:solidFill>
+                <a:latin typeface="Arial"/>
+              </a:defRPr>
+            </a:pPr>
+            <a:r>
+              <a:t>Reading the figure</a:t>
+            </a:r>
+          </a:p>
+        </p:txBody>
+      </p:sp>
+      <p:sp>
+        <p:nvSpPr>
+          <p:cNvPr id="14" name="TextBox 13"/>
+          <p:cNvSpPr txBox="1"/>
+          <p:nvPr/>
+        </p:nvSpPr>
+        <p:spPr>
+          <a:xfrm>
+            <a:off x="8229600" y="2011680"/>
+            <a:ext cx="3364992" cy="4206240"/>
+          </a:xfrm>
+          <a:prstGeom prst="rect">
+            <a:avLst/>
+          </a:prstGeom>
+          <a:noFill/>
+        </p:spPr>
+        <p:txBody>
+          <a:bodyPr wrap="square">
+            <a:spAutoFit/>
+          </a:bodyPr>
+          <a:lstStyle/>
+          <a:p>
+            <a:pPr>
+              <a:spcAft>
+                <a:spcPts val="800"/>
+              </a:spcAft>
+              <a:defRPr sz="1400">
+                <a:solidFill>
+                  <a:srgbClr val="2C3E50"/>
+                </a:solidFill>
+                <a:latin typeface="Arial"/>
+              </a:defRPr>
+            </a:pPr>
+            <a:r>
+              <a:t>•  Best (sample 17): error 0.016</a:t>
+            </a:r>
+          </a:p>
+          <a:p>
+            <a:pPr>
+              <a:spcAft>
+                <a:spcPts val="800"/>
+              </a:spcAft>
+              <a:defRPr sz="1400">
+                <a:solidFill>
+                  <a:srgbClr val="2C3E50"/>
+                </a:solidFill>
+                <a:latin typeface="Arial"/>
+              </a:defRPr>
+            </a:pPr>
+            <a:r>
+              <a:t>•  Median (sample 191): error 0.040</a:t>
+            </a:r>
+          </a:p>
+          <a:p>
+            <a:pPr>
+              <a:spcAft>
+                <a:spcPts val="800"/>
+              </a:spcAft>
+              <a:defRPr sz="1400">
+                <a:solidFill>
+                  <a:srgbClr val="2C3E50"/>
+                </a:solidFill>
+                <a:latin typeface="Arial"/>
+              </a:defRPr>
+            </a:pPr>
+            <a:r>
+              <a:t>•  Worst (sample 95): error 0.347</a:t>
+            </a:r>
+          </a:p>
+          <a:p>
+            <a:pPr>
+              <a:spcAft>
+                <a:spcPts val="800"/>
+              </a:spcAft>
+              <a:defRPr sz="1400">
+                <a:solidFill>
+                  <a:srgbClr val="2C3E50"/>
+                </a:solidFill>
+                <a:latin typeface="Arial"/>
+              </a:defRPr>
+            </a:pPr>
+            <a:r>
+              <a:t>•  The worst case has exactly uniform κ = 0.1: the FNO over-predicts the pressure amplitude.</a:t>
+            </a:r>
+          </a:p>
+          <a:p>
+            <a:pPr>
+              <a:spcAft>
+                <a:spcPts val="800"/>
+              </a:spcAft>
+              <a:defRPr sz="1400">
+                <a:solidFill>
+                  <a:srgbClr val="2C3E50"/>
+                </a:solidFill>
+                <a:latin typeface="Arial"/>
+              </a:defRPr>
+            </a:pPr>
+            <a:r>
+              <a:t>•  Only 2 of 200 test fields are uniform: a rare degenerate input, reported openly rather than excluded.</a:t>
+            </a:r>
+          </a:p>
+        </p:txBody>
+      </p:sp>
+    </p:spTree>
+  </p:cSld>
+  <p:clrMapOvr>
+    <a:masterClrMapping/>
+  </p:clrMapOvr>
+</p:sld>
+</file>
+
+<file path=ppt/slides/slide9.xml><?xml version="1.0" encoding="utf-8"?>
+<p:sld xmlns:a="http://schemas.openxmlformats.org/drawingml/2006/main" xmlns:p="http://schemas.openxmlformats.org/presentationml/2006/main" xmlns:r="http://schemas.openxmlformats.org/officeDocument/2006/relationships">
+  <p:cSld>
+    <p:spTree>
+      <p:nvGrpSpPr>
+        <p:cNvPr id="1" name=""/>
+        <p:cNvGrpSpPr/>
+        <p:nvPr/>
+      </p:nvGrpSpPr>
+      <p:grpSpPr/>
+      <p:sp>
+        <p:nvSpPr>
+          <p:cNvPr id="2" name="Rectangle 1"/>
+          <p:cNvSpPr/>
+          <p:nvPr/>
+        </p:nvSpPr>
+        <p:spPr>
+          <a:xfrm>
+            <a:off x="0" y="0"/>
+            <a:ext cx="12188952" cy="6858000"/>
+          </a:xfrm>
+          <a:prstGeom prst="rect">
+            <a:avLst/>
+          </a:prstGeom>
+          <a:solidFill>
+            <a:srgbClr val="F4F6F9"/>
+          </a:solidFill>
+          <a:ln w="15240">
+            <a:noFill/>
+          </a:ln>
+        </p:spPr>
+        <p:style>
+          <a:lnRef idx="1">
+            <a:schemeClr val="accent1"/>
+          </a:lnRef>
+          <a:fillRef idx="3">
+            <a:schemeClr val="accent1"/>
+          </a:fillRef>
+          <a:effectRef idx="2">
+            <a:schemeClr val="accent1"/>
+          </a:effectRef>
+          <a:fontRef idx="minor">
+            <a:schemeClr val="lt1"/>
+          </a:fontRef>
+        </p:style>
+        <p:txBody>
+          <a:bodyPr rtlCol="0" anchor="ctr"/>
+          <a:lstStyle/>
+          <a:p>
+            <a:pPr algn="ctr"/>
+          </a:p>
+        </p:txBody>
+      </p:sp>
+      <p:sp>
+        <p:nvSpPr>
+          <p:cNvPr id="3" name="Rectangle 2"/>
+          <p:cNvSpPr/>
+          <p:nvPr/>
+        </p:nvSpPr>
+        <p:spPr>
+          <a:xfrm>
+            <a:off x="0" y="0"/>
+            <a:ext cx="12188952" cy="1051560"/>
+          </a:xfrm>
+          <a:prstGeom prst="rect">
+            <a:avLst/>
+          </a:prstGeom>
+          <a:solidFill>
+            <a:srgbClr val="1A2E4A"/>
+          </a:solidFill>
+          <a:ln w="15240">
+            <a:noFill/>
+          </a:ln>
+        </p:spPr>
+        <p:style>
+          <a:lnRef idx="1">
+            <a:schemeClr val="accent1"/>
+          </a:lnRef>
+          <a:fillRef idx="3">
+            <a:schemeClr val="accent1"/>
+          </a:fillRef>
+          <a:effectRef idx="2">
+            <a:schemeClr val="accent1"/>
+          </a:effectRef>
+          <a:fontRef idx="minor">
+            <a:schemeClr val="lt1"/>
+          </a:fontRef>
+        </p:style>
+        <p:txBody>
+          <a:bodyPr rtlCol="0" anchor="ctr"/>
+          <a:lstStyle/>
+          <a:p>
+            <a:pPr algn="ctr"/>
+          </a:p>
+        </p:txBody>
+      </p:sp>
+      <p:sp>
+        <p:nvSpPr>
+          <p:cNvPr id="4" name="Rectangle 3"/>
+          <p:cNvSpPr/>
+          <p:nvPr/>
+        </p:nvSpPr>
+        <p:spPr>
+          <a:xfrm>
+            <a:off x="0" y="1051560"/>
+            <a:ext cx="12188952" cy="73152"/>
           </a:xfrm>
           <a:prstGeom prst="rect">
             <a:avLst/>
@@ -7192,14 +9117,14 @@
       </p:sp>
       <p:sp>
         <p:nvSpPr>
-          <p:cNvPr id="6" name="TextBox 5"/>
+          <p:cNvPr id="5" name="TextBox 4"/>
           <p:cNvSpPr txBox="1"/>
           <p:nvPr/>
         </p:nvSpPr>
         <p:spPr>
           <a:xfrm>
-            <a:off x="457200" y="1554480"/>
-            <a:ext cx="1828800" cy="777240"/>
+            <a:off x="457200" y="164592"/>
+            <a:ext cx="11274552" cy="502920"/>
           </a:xfrm>
           <a:prstGeom prst="rect">
             <a:avLst/>
@@ -7212,8 +9137,8 @@
           </a:bodyPr>
           <a:lstStyle/>
           <a:p>
-            <a:pPr algn="ctr">
-              <a:defRPr sz="1700" b="1">
+            <a:pPr algn="l">
+              <a:defRPr sz="3000" b="1">
                 <a:solidFill>
                   <a:srgbClr val="FFFFFF"/>
                 </a:solidFill>
@@ -7221,21 +9146,21 @@
               </a:defRPr>
             </a:pPr>
             <a:r>
-              <a:t>Status</a:t>
-            </a:r>
-          </a:p>
-        </p:txBody>
-      </p:sp>
-      <p:sp>
-        <p:nvSpPr>
-          <p:cNvPr id="7" name="TextBox 6"/>
+              <a:t>Issues Faced and Future Work</a:t>
+            </a:r>
+          </a:p>
+        </p:txBody>
+      </p:sp>
+      <p:sp>
+        <p:nvSpPr>
+          <p:cNvPr id="6" name="TextBox 5"/>
           <p:cNvSpPr txBox="1"/>
           <p:nvPr/>
         </p:nvSpPr>
         <p:spPr>
           <a:xfrm>
-            <a:off x="2468880" y="1600200"/>
-            <a:ext cx="9262872" cy="749808"/>
+            <a:off x="475488" y="658368"/>
+            <a:ext cx="11274552" cy="320040"/>
           </a:xfrm>
           <a:prstGeom prst="rect">
             <a:avLst/>
@@ -7249,7 +9174,7 @@
           <a:lstStyle/>
           <a:p>
             <a:pPr algn="l">
-              <a:defRPr sz="1800" b="0">
+              <a:defRPr sz="1600" b="0">
                 <a:solidFill>
                   <a:srgbClr val="D6E4F0"/>
                 </a:solidFill>
@@ -7257,27 +9182,27 @@
               </a:defRPr>
             </a:pPr>
             <a:r>
-              <a:t>Stage 2 implementation complete. Data pipeline and models validated.</a:t>
-            </a:r>
-          </a:p>
-        </p:txBody>
-      </p:sp>
-      <p:sp>
-        <p:nvSpPr>
-          <p:cNvPr id="8" name="Rectangle 7"/>
+              <a:t>What we hit at this stage, and the plan for Stage 3</a:t>
+            </a:r>
+          </a:p>
+        </p:txBody>
+      </p:sp>
+      <p:sp>
+        <p:nvSpPr>
+          <p:cNvPr id="7" name="Rectangle 6"/>
           <p:cNvSpPr/>
           <p:nvPr/>
         </p:nvSpPr>
         <p:spPr>
           <a:xfrm>
-            <a:off x="457200" y="2286000"/>
-            <a:ext cx="1828800" cy="822960"/>
+            <a:off x="0" y="6537960"/>
+            <a:ext cx="12188952" cy="320040"/>
           </a:xfrm>
           <a:prstGeom prst="rect">
             <a:avLst/>
           </a:prstGeom>
           <a:solidFill>
-            <a:srgbClr val="2E86C1"/>
+            <a:srgbClr val="1A2E4A"/>
           </a:solidFill>
           <a:ln w="15240">
             <a:noFill/>
@@ -7307,14 +9232,14 @@
       </p:sp>
       <p:sp>
         <p:nvSpPr>
-          <p:cNvPr id="9" name="TextBox 8"/>
+          <p:cNvPr id="8" name="TextBox 7"/>
           <p:cNvSpPr txBox="1"/>
           <p:nvPr/>
         </p:nvSpPr>
         <p:spPr>
           <a:xfrm>
-            <a:off x="457200" y="2468880"/>
-            <a:ext cx="1828800" cy="777240"/>
+            <a:off x="411480" y="6565392"/>
+            <a:ext cx="11365992" cy="274320"/>
           </a:xfrm>
           <a:prstGeom prst="rect">
             <a:avLst/>
@@ -7327,30 +9252,30 @@
           </a:bodyPr>
           <a:lstStyle/>
           <a:p>
-            <a:pPr algn="ctr">
-              <a:defRPr sz="1700" b="1">
-                <a:solidFill>
-                  <a:srgbClr val="FFFFFF"/>
-                </a:solidFill>
-                <a:latin typeface="Arial"/>
-              </a:defRPr>
-            </a:pPr>
-            <a:r>
-              <a:t>Baseline</a:t>
-            </a:r>
-          </a:p>
-        </p:txBody>
-      </p:sp>
-      <p:sp>
-        <p:nvSpPr>
-          <p:cNvPr id="10" name="TextBox 9"/>
+            <a:pPr algn="l">
+              <a:defRPr sz="1200" b="0">
+                <a:solidFill>
+                  <a:srgbClr val="D6E4F0"/>
+                </a:solidFill>
+                <a:latin typeface="Arial"/>
+              </a:defRPr>
+            </a:pPr>
+            <a:r>
+              <a:t>AE646 Stage 2 Interim Evaluation  |  Team PINNacles</a:t>
+            </a:r>
+          </a:p>
+        </p:txBody>
+      </p:sp>
+      <p:sp>
+        <p:nvSpPr>
+          <p:cNvPr id="9" name="TextBox 8"/>
           <p:cNvSpPr txBox="1"/>
           <p:nvPr/>
         </p:nvSpPr>
         <p:spPr>
           <a:xfrm>
-            <a:off x="2468880" y="2514600"/>
-            <a:ext cx="9262872" cy="749808"/>
+            <a:off x="10817352" y="6565392"/>
+            <a:ext cx="914400" cy="274320"/>
           </a:xfrm>
           <a:prstGeom prst="rect">
             <a:avLst/>
@@ -7363,39 +9288,41 @@
           </a:bodyPr>
           <a:lstStyle/>
           <a:p>
-            <a:pPr algn="l">
-              <a:defRPr sz="1800" b="0">
-                <a:solidFill>
-                  <a:srgbClr val="D6E4F0"/>
-                </a:solidFill>
-                <a:latin typeface="Arial"/>
-              </a:defRPr>
-            </a:pPr>
-            <a:r>
-              <a:t>MLP implemented. Fast inference, but high error and no zero-shot.</a:t>
-            </a:r>
-          </a:p>
-        </p:txBody>
-      </p:sp>
-      <p:sp>
-        <p:nvSpPr>
-          <p:cNvPr id="11" name="Rectangle 10"/>
+            <a:pPr algn="r">
+              <a:defRPr sz="1200" b="1">
+                <a:solidFill>
+                  <a:srgbClr val="FFFFFF"/>
+                </a:solidFill>
+                <a:latin typeface="Arial"/>
+              </a:defRPr>
+            </a:pPr>
+            <a:r>
+              <a:t>9 / 10</a:t>
+            </a:r>
+          </a:p>
+        </p:txBody>
+      </p:sp>
+      <p:sp>
+        <p:nvSpPr>
+          <p:cNvPr id="10" name="Rectangle 9"/>
           <p:cNvSpPr/>
           <p:nvPr/>
         </p:nvSpPr>
         <p:spPr>
           <a:xfrm>
-            <a:off x="457200" y="3200400"/>
-            <a:ext cx="1828800" cy="822960"/>
+            <a:off x="411480" y="1371600"/>
+            <a:ext cx="5545836" cy="5074920"/>
           </a:xfrm>
           <a:prstGeom prst="rect">
             <a:avLst/>
           </a:prstGeom>
           <a:solidFill>
-            <a:srgbClr val="2E86C1"/>
+            <a:srgbClr val="FFFFFF"/>
           </a:solidFill>
-          <a:ln w="15240">
-            <a:noFill/>
+          <a:ln w="12700">
+            <a:solidFill>
+              <a:srgbClr val="D6E4F0"/>
+            </a:solidFill>
           </a:ln>
         </p:spPr>
         <p:style>
@@ -7422,14 +9349,14 @@
       </p:sp>
       <p:sp>
         <p:nvSpPr>
-          <p:cNvPr id="12" name="TextBox 11"/>
+          <p:cNvPr id="11" name="TextBox 10"/>
           <p:cNvSpPr txBox="1"/>
           <p:nvPr/>
         </p:nvSpPr>
         <p:spPr>
           <a:xfrm>
-            <a:off x="457200" y="3383280"/>
-            <a:ext cx="1828800" cy="777240"/>
+            <a:off x="640080" y="1508760"/>
+            <a:ext cx="5088636" cy="365760"/>
           </a:xfrm>
           <a:prstGeom prst="rect">
             <a:avLst/>
@@ -7442,30 +9369,30 @@
           </a:bodyPr>
           <a:lstStyle/>
           <a:p>
-            <a:pPr algn="ctr">
-              <a:defRPr sz="1700" b="1">
-                <a:solidFill>
-                  <a:srgbClr val="FFFFFF"/>
-                </a:solidFill>
-                <a:latin typeface="Arial"/>
-              </a:defRPr>
-            </a:pPr>
-            <a:r>
-              <a:t>SciML</a:t>
-            </a:r>
-          </a:p>
-        </p:txBody>
-      </p:sp>
-      <p:sp>
-        <p:nvSpPr>
-          <p:cNvPr id="13" name="TextBox 12"/>
+            <a:pPr algn="l">
+              <a:defRPr sz="1900" b="1">
+                <a:solidFill>
+                  <a:srgbClr val="CA6F1E"/>
+                </a:solidFill>
+                <a:latin typeface="Arial"/>
+              </a:defRPr>
+            </a:pPr>
+            <a:r>
+              <a:t>Issues faced</a:t>
+            </a:r>
+          </a:p>
+        </p:txBody>
+      </p:sp>
+      <p:sp>
+        <p:nvSpPr>
+          <p:cNvPr id="12" name="TextBox 11"/>
           <p:cNvSpPr txBox="1"/>
           <p:nvPr/>
         </p:nvSpPr>
         <p:spPr>
           <a:xfrm>
-            <a:off x="2468880" y="3429000"/>
-            <a:ext cx="9262872" cy="749808"/>
+            <a:off x="640080" y="2011680"/>
+            <a:ext cx="5088636" cy="4206240"/>
           </a:xfrm>
           <a:prstGeom prst="rect">
             <a:avLst/>
@@ -7478,39 +9405,92 @@
           </a:bodyPr>
           <a:lstStyle/>
           <a:p>
-            <a:pPr algn="l">
-              <a:defRPr sz="1800" b="0">
-                <a:solidFill>
-                  <a:srgbClr val="D6E4F0"/>
-                </a:solidFill>
-                <a:latin typeface="Arial"/>
-              </a:defRPr>
-            </a:pPr>
-            <a:r>
-              <a:t>FNO implemented. 37% lower error, fewer parameters, super-res capable.</a:t>
-            </a:r>
-          </a:p>
-        </p:txBody>
-      </p:sp>
-      <p:sp>
-        <p:nvSpPr>
-          <p:cNvPr id="14" name="Rectangle 13"/>
+            <a:pPr>
+              <a:spcAft>
+                <a:spcPts val="1200"/>
+              </a:spcAft>
+              <a:defRPr sz="1800">
+                <a:solidFill>
+                  <a:srgbClr val="2C3E50"/>
+                </a:solidFill>
+                <a:latin typeface="Arial"/>
+              </a:defRPr>
+            </a:pPr>
+            <a:r>
+              <a:t>•  Metric convention: relative L2 must be computed in physical units, not on standardised fields</a:t>
+            </a:r>
+          </a:p>
+          <a:p>
+            <a:pPr>
+              <a:spcAft>
+                <a:spcPts val="1200"/>
+              </a:spcAft>
+              <a:defRPr sz="1800">
+                <a:solidFill>
+                  <a:srgbClr val="2C3E50"/>
+                </a:solidFill>
+                <a:latin typeface="Arial"/>
+              </a:defRPr>
+            </a:pPr>
+            <a:r>
+              <a:t>•  Uniform-κ samples: degenerate input; FNO over-predicts amplitude</a:t>
+            </a:r>
+          </a:p>
+          <a:p>
+            <a:pPr>
+              <a:spcAft>
+                <a:spcPts val="1200"/>
+              </a:spcAft>
+              <a:defRPr sz="1800">
+                <a:solidFill>
+                  <a:srgbClr val="2C3E50"/>
+                </a:solidFill>
+                <a:latin typeface="Arial"/>
+              </a:defRPr>
+            </a:pPr>
+            <a:r>
+              <a:t>•  Compute: 1.3 GB raw file and training moved to the lab GPU workstation</a:t>
+            </a:r>
+          </a:p>
+          <a:p>
+            <a:pPr>
+              <a:spcAft>
+                <a:spcPts val="1200"/>
+              </a:spcAft>
+              <a:defRPr sz="1800">
+                <a:solidFill>
+                  <a:srgbClr val="2C3E50"/>
+                </a:solidFill>
+                <a:latin typeface="Arial"/>
+              </a:defRPr>
+            </a:pPr>
+            <a:r>
+              <a:t>•  Run-to-run variance (~0.004): early runs were unseeded; now fixed, and only larger gaps are interpreted</a:t>
+            </a:r>
+          </a:p>
+        </p:txBody>
+      </p:sp>
+      <p:sp>
+        <p:nvSpPr>
+          <p:cNvPr id="13" name="Rectangle 12"/>
           <p:cNvSpPr/>
           <p:nvPr/>
         </p:nvSpPr>
         <p:spPr>
           <a:xfrm>
-            <a:off x="457200" y="4114800"/>
-            <a:ext cx="1828800" cy="822960"/>
+            <a:off x="6231636" y="1371600"/>
+            <a:ext cx="5545836" cy="5074920"/>
           </a:xfrm>
           <a:prstGeom prst="rect">
             <a:avLst/>
           </a:prstGeom>
           <a:solidFill>
-            <a:srgbClr val="2E86C1"/>
+            <a:srgbClr val="FFFFFF"/>
           </a:solidFill>
-          <a:ln w="15240">
-            <a:noFill/>
+          <a:ln w="12700">
+            <a:solidFill>
+              <a:srgbClr val="D6E4F0"/>
+            </a:solidFill>
           </a:ln>
         </p:spPr>
         <p:style>
@@ -7537,14 +9517,14 @@
       </p:sp>
       <p:sp>
         <p:nvSpPr>
-          <p:cNvPr id="15" name="TextBox 14"/>
+          <p:cNvPr id="14" name="TextBox 13"/>
           <p:cNvSpPr txBox="1"/>
           <p:nvPr/>
         </p:nvSpPr>
         <p:spPr>
           <a:xfrm>
-            <a:off x="457200" y="4297680"/>
-            <a:ext cx="1828800" cy="777240"/>
+            <a:off x="6460236" y="1508760"/>
+            <a:ext cx="5088636" cy="365760"/>
           </a:xfrm>
           <a:prstGeom prst="rect">
             <a:avLst/>
@@ -7557,30 +9537,30 @@
           </a:bodyPr>
           <a:lstStyle/>
           <a:p>
-            <a:pPr algn="ctr">
-              <a:defRPr sz="1700" b="1">
-                <a:solidFill>
-                  <a:srgbClr val="FFFFFF"/>
-                </a:solidFill>
-                <a:latin typeface="Arial"/>
-              </a:defRPr>
-            </a:pPr>
-            <a:r>
-              <a:t>Next Steps</a:t>
-            </a:r>
-          </a:p>
-        </p:txBody>
-      </p:sp>
-      <p:sp>
-        <p:nvSpPr>
-          <p:cNvPr id="16" name="TextBox 15"/>
+            <a:pPr algn="l">
+              <a:defRPr sz="1900" b="1">
+                <a:solidFill>
+                  <a:srgbClr val="1E8B4C"/>
+                </a:solidFill>
+                <a:latin typeface="Arial"/>
+              </a:defRPr>
+            </a:pPr>
+            <a:r>
+              <a:t>Future work (Stage 3)</a:t>
+            </a:r>
+          </a:p>
+        </p:txBody>
+      </p:sp>
+      <p:sp>
+        <p:nvSpPr>
+          <p:cNvPr id="15" name="TextBox 14"/>
           <p:cNvSpPr txBox="1"/>
           <p:nvPr/>
         </p:nvSpPr>
         <p:spPr>
           <a:xfrm>
-            <a:off x="2468880" y="4343400"/>
-            <a:ext cx="9262872" cy="749808"/>
+            <a:off x="6460236" y="2011680"/>
+            <a:ext cx="5088636" cy="4206240"/>
           </a:xfrm>
           <a:prstGeom prst="rect">
             <a:avLst/>
@@ -7593,95 +9573,83 @@
           </a:bodyPr>
           <a:lstStyle/>
           <a:p>
-            <a:pPr algn="l">
-              <a:defRPr sz="1800" b="0">
-                <a:solidFill>
-                  <a:srgbClr val="D6E4F0"/>
-                </a:solidFill>
-                <a:latin typeface="Arial"/>
-              </a:defRPr>
-            </a:pPr>
-            <a:r>
-              <a:t>Hyperparameter ablation and final Stage 3 report formatting.</a:t>
-            </a:r>
-          </a:p>
-        </p:txBody>
-      </p:sp>
-      <p:sp>
-        <p:nvSpPr>
-          <p:cNvPr id="17" name="Rectangle 16"/>
-          <p:cNvSpPr/>
-          <p:nvPr/>
-        </p:nvSpPr>
-        <p:spPr>
-          <a:xfrm>
-            <a:off x="0" y="6291072"/>
-            <a:ext cx="12188952" cy="566928"/>
-          </a:xfrm>
-          <a:prstGeom prst="rect">
-            <a:avLst/>
-          </a:prstGeom>
-          <a:solidFill>
-            <a:srgbClr val="1F4E79"/>
-          </a:solidFill>
-          <a:ln w="15240">
-            <a:noFill/>
-          </a:ln>
-        </p:spPr>
-        <p:style>
-          <a:lnRef idx="1">
-            <a:schemeClr val="accent1"/>
-          </a:lnRef>
-          <a:fillRef idx="3">
-            <a:schemeClr val="accent1"/>
-          </a:fillRef>
-          <a:effectRef idx="2">
-            <a:schemeClr val="accent1"/>
-          </a:effectRef>
-          <a:fontRef idx="minor">
-            <a:schemeClr val="lt1"/>
-          </a:fontRef>
-        </p:style>
-        <p:txBody>
-          <a:bodyPr rtlCol="0" anchor="ctr"/>
-          <a:lstStyle/>
-          <a:p>
-            <a:pPr algn="ctr"/>
-          </a:p>
-        </p:txBody>
-      </p:sp>
-      <p:sp>
-        <p:nvSpPr>
-          <p:cNvPr id="18" name="TextBox 17"/>
-          <p:cNvSpPr txBox="1"/>
-          <p:nvPr/>
-        </p:nvSpPr>
-        <p:spPr>
-          <a:xfrm>
-            <a:off x="457200" y="6355080"/>
-            <a:ext cx="11274552" cy="420624"/>
-          </a:xfrm>
-          <a:prstGeom prst="rect">
-            <a:avLst/>
-          </a:prstGeom>
-          <a:noFill/>
-        </p:spPr>
-        <p:txBody>
-          <a:bodyPr wrap="square">
-            <a:spAutoFit/>
-          </a:bodyPr>
-          <a:lstStyle/>
-          <a:p>
-            <a:pPr algn="ctr">
-              <a:defRPr sz="1900" b="0">
-                <a:solidFill>
-                  <a:srgbClr val="FFFFFF"/>
-                </a:solidFill>
-                <a:latin typeface="Arial"/>
-              </a:defRPr>
-            </a:pPr>
-            <a:r>
-              <a:t>Thank you  -  Questions welcome</a:t>
+            <a:pPr>
+              <a:spcAft>
+                <a:spcPts val="1200"/>
+              </a:spcAft>
+              <a:defRPr sz="1800">
+                <a:solidFill>
+                  <a:srgbClr val="2C3E50"/>
+                </a:solidFill>
+                <a:latin typeface="Arial"/>
+              </a:defRPr>
+            </a:pPr>
+            <a:r>
+              <a:t>•  FNO scaling study: larger width / modes / depth vs the baseline</a:t>
+            </a:r>
+          </a:p>
+          <a:p>
+            <a:pPr>
+              <a:spcAft>
+                <a:spcPts val="1200"/>
+              </a:spcAft>
+              <a:defRPr sz="1800">
+                <a:solidFill>
+                  <a:srgbClr val="2C3E50"/>
+                </a:solidFill>
+                <a:latin typeface="Arial"/>
+              </a:defRPr>
+            </a:pPr>
+            <a:r>
+              <a:t>•  Resolution generalisation: evaluate at native 128×128</a:t>
+            </a:r>
+          </a:p>
+          <a:p>
+            <a:pPr>
+              <a:spcAft>
+                <a:spcPts val="1200"/>
+              </a:spcAft>
+              <a:defRPr sz="1800">
+                <a:solidFill>
+                  <a:srgbClr val="2C3E50"/>
+                </a:solidFill>
+                <a:latin typeface="Arial"/>
+              </a:defRPr>
+            </a:pPr>
+            <a:r>
+              <a:t>•  Computational cost: speed vs the FDM solver; FNO operation profiling</a:t>
+            </a:r>
+          </a:p>
+          <a:p>
+            <a:pPr>
+              <a:spcAft>
+                <a:spcPts val="1200"/>
+              </a:spcAft>
+              <a:defRPr sz="1800">
+                <a:solidFill>
+                  <a:srgbClr val="2C3E50"/>
+                </a:solidFill>
+                <a:latin typeface="Arial"/>
+              </a:defRPr>
+            </a:pPr>
+            <a:r>
+              <a:t>•  Physical interpretation: error vs κ geometry</a:t>
+            </a:r>
+          </a:p>
+          <a:p>
+            <a:pPr>
+              <a:spcAft>
+                <a:spcPts val="1200"/>
+              </a:spcAft>
+              <a:defRPr sz="1800">
+                <a:solidFill>
+                  <a:srgbClr val="2C3E50"/>
+                </a:solidFill>
+                <a:latin typeface="Arial"/>
+              </a:defRPr>
+            </a:pPr>
+            <a:r>
+              <a:t>•  Learning-rate schedule comparison; final report, presentation, viva</a:t>
             </a:r>
           </a:p>
         </p:txBody>

--- a/stage2/PINNacles_Stage2_Presentation.pptx
+++ b/stage2/PINNacles_Stage2_Presentation.pptx
@@ -3775,7 +3775,7 @@
               </a:defRPr>
             </a:pPr>
             <a:r>
-              <a:t>FNO (4.7 M) implemented and trained: mean rel. L2 0.052, 37% lower with 9× fewer parameters</a:t>
+              <a:t>FNO (4.7 M) implemented and trained: mean rel. L2 0.052, 36% lower with 9× fewer parameters</a:t>
             </a:r>
           </a:p>
         </p:txBody>
@@ -8344,7 +8344,7 @@
               </a:defRPr>
             </a:pPr>
             <a:r>
-              <a:t>•  FNO: 37% lower mean error with 9× fewer parameters</a:t>
+              <a:t>•  FNO: 36% lower mean error with 9× fewer parameters</a:t>
             </a:r>
           </a:p>
           <a:p>
